--- a/it/slides/05-Architettura_dei_Calcolatori-Rappresentazione_dei_Numeri_Interi.pptx
+++ b/it/slides/05-Architettura_dei_Calcolatori-Rappresentazione_dei_Numeri_Interi.pptx
@@ -143,19 +143,19 @@
   <p:extLst>
     <p:ext uri="{521415D9-36F7-43E2-AB2F-B90AF26B5E84}">
       <p14:sectionLst xmlns:p14="http://schemas.microsoft.com/office/powerpoint/2010/main">
-        <p14:section name="Apertura" id="{0d3e6c8c-9e38-f9e2-5487-6918c267ce7b}">
+        <p14:section name="Apertura" id="{1c8fa9fd-149a-9069-c5b7-651f3f9b2b9e}">
           <p14:sldIdLst>
             <p14:sldId id="256"/>
             <p14:sldId id="257"/>
           </p14:sldIdLst>
         </p14:section>
-        <p14:section name="Riscaldamento sulla macchina" id="{269cc931-e7db-32b8-28ea-2f9245cbe1a5}">
+        <p14:section name="Riscaldamento sulla macchina" id="{47f5f381-cdac-1de1-5edd-48dc8fcd332f}">
           <p14:sldIdLst>
             <p14:sldId id="258"/>
             <p14:sldId id="259"/>
           </p14:sldIdLst>
         </p14:section>
-        <p14:section name="Basi e conversioni" id="{4d651d25-3a1d-4abb-3d7f-012a9ff602f7}">
+        <p14:section name="Basi e conversioni" id="{41b58f20-41a0-1760-7eba-f027ccb93e2a}">
           <p14:sldIdLst>
             <p14:sldId id="260"/>
             <p14:sldId id="261"/>
@@ -164,7 +164,7 @@
             <p14:sldId id="264"/>
           </p14:sldIdLst>
         </p14:section>
-        <p14:section name="Numeri naturali e overflow" id="{ed68d0a2-a7c4-1c48-1ea8-6f754c338ddc}">
+        <p14:section name="Numeri naturali e overflow" id="{242bccb0-7208-0962-a2fc-212c8bb65d43}">
           <p14:sldIdLst>
             <p14:sldId id="265"/>
             <p14:sldId id="266"/>
@@ -174,7 +174,7 @@
             <p14:sldId id="270"/>
           </p14:sldIdLst>
         </p14:section>
-        <p14:section name="Interi con segno" id="{2ea55e96-442b-b1ca-2000-26cf2b30270c}">
+        <p14:section name="Interi con segno" id="{8a448d6b-7389-aad9-0eb1-4e992db2531f}">
           <p14:sldIdLst>
             <p14:sldId id="271"/>
             <p14:sldId id="272"/>
@@ -187,7 +187,7 @@
             <p14:sldId id="279"/>
           </p14:sldIdLst>
         </p14:section>
-        <p14:section name="Ritorno alla macchina" id="{e4603e22-aaab-c270-ca1f-daac084f1a2b}">
+        <p14:section name="Ritorno alla macchina" id="{6a4074f1-f3fe-40e1-04a9-6fcf08a61a14}">
           <p14:sldIdLst>
             <p14:sldId id="280"/>
             <p14:sldId id="281"/>
@@ -29439,7 +29439,7 @@
                 <a:ea typeface="Calibri" pitchFamily="34" charset="-122"/>
                 <a:cs typeface="Calibri" pitchFamily="34" charset="-120"/>
               </a:rPr>
-              <a:t>0.101</a:t>
+              <a:t>0,101</a:t>
             </a:r>
             <a:endParaRPr lang="en-US" sz="2200" dirty="0"/>
           </a:p>
@@ -29552,7 +29552,7 @@
                 <a:ea typeface="Calibri" pitchFamily="34" charset="-122"/>
                 <a:cs typeface="Calibri" pitchFamily="34" charset="-120"/>
               </a:rPr>
-              <a:t>0.110</a:t>
+              <a:t>0,110</a:t>
             </a:r>
             <a:endParaRPr lang="en-US" sz="2200" dirty="0"/>
           </a:p>
@@ -29665,7 +29665,7 @@
                 <a:ea typeface="Calibri" pitchFamily="34" charset="-122"/>
                 <a:cs typeface="Calibri" pitchFamily="34" charset="-120"/>
               </a:rPr>
-              <a:t>0.625</a:t>
+              <a:t>0,625</a:t>
             </a:r>
             <a:endParaRPr lang="en-US" sz="2200" dirty="0"/>
           </a:p>
@@ -29778,7 +29778,7 @@
                 <a:ea typeface="Calibri" pitchFamily="34" charset="-122"/>
                 <a:cs typeface="Calibri" pitchFamily="34" charset="-120"/>
               </a:rPr>
-              <a:t>0.011</a:t>
+              <a:t>0,011</a:t>
             </a:r>
             <a:endParaRPr lang="en-US" sz="2200" dirty="0"/>
           </a:p>

--- a/it/slides/05-Architettura_dei_Calcolatori-Rappresentazione_dei_Numeri_Interi.pptx
+++ b/it/slides/05-Architettura_dei_Calcolatori-Rappresentazione_dei_Numeri_Interi.pptx
@@ -126,13 +126,13 @@
   <p:extLst>
     <p:ext uri="{521415D9-36F7-43E2-AB2F-B90AF26B5E84}">
       <p14:sectionLst xmlns:p14="http://schemas.microsoft.com/office/powerpoint/2010/main">
-        <p14:section name="Apertura" id="{cff34ca7-935f-9603-d729-843d1a57ab7f}">
+        <p14:section name="Apertura" id="{9d3996f4-c76b-702c-b3f3-9e5d906e0706}">
           <p14:sldIdLst>
             <p14:sldId id="256"/>
             <p14:sldId id="257"/>
           </p14:sldIdLst>
         </p14:section>
-        <p14:section name="Basi e conversioni" id="{35fa222a-8c2d-a53d-3dfd-80a2bfa978a2}">
+        <p14:section name="Basi e conversioni" id="{719bff70-ac73-48c9-01f1-8537fa0e377e}">
           <p14:sldIdLst>
             <p14:sldId id="258"/>
             <p14:sldId id="259"/>
@@ -140,14 +140,14 @@
             <p14:sldId id="261"/>
           </p14:sldIdLst>
         </p14:section>
-        <p14:section name="Numeri naturali e overflow" id="{aaa3a746-7115-8419-f0d0-c1597ac9eb5f}">
+        <p14:section name="Numeri naturali e overflow" id="{9a24b5bf-1c44-abb7-c5e4-498e12dccd89}">
           <p14:sldIdLst>
             <p14:sldId id="262"/>
             <p14:sldId id="263"/>
             <p14:sldId id="264"/>
           </p14:sldIdLst>
         </p14:section>
-        <p14:section name="Interi con segno" id="{35139cb6-2c08-2a70-8c52-f58bc3d84a61}">
+        <p14:section name="Interi con segno" id="{74b6827a-87dd-fdaa-aa6a-e76e12e0a5b2}">
           <p14:sldIdLst>
             <p14:sldId id="265"/>
             <p14:sldId id="266"/>
@@ -157,7 +157,7 @@
             <p14:sldId id="270"/>
           </p14:sldIdLst>
         </p14:section>
-        <p14:section name="Ritorno alla macchina" id="{21665213-cd18-4a3e-757e-0a3233358df3}">
+        <p14:section name="Ritorno alla macchina" id="{0e1d2a69-797e-81f3-593b-517a14842eb8}">
           <p14:sldIdLst>
             <p14:sldId id="271"/>
             <p14:sldId id="272"/>
@@ -3293,7 +3293,63 @@
       </p:sp>
       <p:sp>
         <p:nvSpPr>
-          <p:cNvPr id="12" name="Shape 10"/>
+          <p:cNvPr id="12" name="Text 10"/>
+          <p:cNvSpPr txBox="1"/>
+          <p:nvPr/>
+        </p:nvSpPr>
+        <p:spPr>
+          <a:xfrm>
+            <a:off x="4693615" y="566928"/>
+            <a:ext cx="6949440" cy="640080"/>
+          </a:xfrm>
+          <a:prstGeom prst="rect">
+            <a:avLst/>
+          </a:prstGeom>
+          <a:noFill/>
+          <a:ln/>
+        </p:spPr>
+        <p:txBody>
+          <a:bodyPr wrap="square" lIns="0" tIns="0" rIns="0" bIns="0" rtlCol="0" anchor="t"/>
+          <a:lstStyle/>
+          <a:p>
+            <a:pPr algn="r" indent="0" marL="0">
+              <a:buNone/>
+            </a:pPr>
+            <a:r>
+              <a:rPr lang="en-US" sz="1300" dirty="0">
+                <a:solidFill>
+                  <a:srgbClr val="CFE3EA"/>
+                </a:solidFill>
+                <a:latin typeface="Calibri" pitchFamily="34" charset="0"/>
+                <a:ea typeface="Calibri" pitchFamily="34" charset="-122"/>
+                <a:cs typeface="Calibri" pitchFamily="34" charset="-120"/>
+              </a:rPr>
+              <a:t>Presentazione della lezione. I listati, il programma completo e come provarlo sono nella presentazione del codice:</a:t>
+            </a:r>
+            <a:endParaRPr lang="en-US" sz="1300" dirty="0"/>
+          </a:p>
+          <a:p>
+            <a:pPr algn="r" indent="0" marL="0">
+              <a:buNone/>
+            </a:pPr>
+            <a:r>
+              <a:rPr lang="en-US" sz="1300" dirty="0">
+                <a:solidFill>
+                  <a:srgbClr val="CFE3EA"/>
+                </a:solidFill>
+                <a:latin typeface="Calibri" pitchFamily="34" charset="0"/>
+                <a:ea typeface="Calibri" pitchFamily="34" charset="-122"/>
+                <a:cs typeface="Calibri" pitchFamily="34" charset="-120"/>
+              </a:rPr>
+              <a:t>05-Architettura_dei_Calcolatori-Rappresentazione_dei_Numeri_Interi-Codice.pptx</a:t>
+            </a:r>
+            <a:endParaRPr lang="en-US" sz="1300" dirty="0"/>
+          </a:p>
+        </p:txBody>
+      </p:sp>
+      <p:sp>
+        <p:nvSpPr>
+          <p:cNvPr id="13" name="Shape 11"/>
           <p:cNvSpPr/>
           <p:nvPr/>
         </p:nvSpPr>
@@ -3320,7 +3376,7 @@
       </p:sp>
       <p:pic>
         <p:nvPicPr>
-          <p:cNvPr id="13" name="Image 0" descr="/Users/raffaelemontella/devel/riscv-prg32/computer-architecture-with-prg32/tools/assets/lab2_step2_move.png">    </p:cNvPr>
+          <p:cNvPr id="14" name="Image 0" descr="/Users/raffaelemontella/devel/riscv-prg32/computer-architecture-with-prg32/tools/assets/lab2_step2_move.png">    </p:cNvPr>
           <p:cNvPicPr>
             <a:picLocks noChangeAspect="1"/>
           </p:cNvPicPr>

--- a/it/slides/05-Architettura_dei_Calcolatori-Rappresentazione_dei_Numeri_Interi.pptx
+++ b/it/slides/05-Architettura_dei_Calcolatori-Rappresentazione_dei_Numeri_Interi.pptx
@@ -126,13 +126,13 @@
   <p:extLst>
     <p:ext uri="{521415D9-36F7-43E2-AB2F-B90AF26B5E84}">
       <p14:sectionLst xmlns:p14="http://schemas.microsoft.com/office/powerpoint/2010/main">
-        <p14:section name="Apertura" id="{9d3996f4-c76b-702c-b3f3-9e5d906e0706}">
+        <p14:section name="Apertura" id="{b432e54a-4690-8896-69b5-d5a9c3956d0f}">
           <p14:sldIdLst>
             <p14:sldId id="256"/>
             <p14:sldId id="257"/>
           </p14:sldIdLst>
         </p14:section>
-        <p14:section name="Basi e conversioni" id="{719bff70-ac73-48c9-01f1-8537fa0e377e}">
+        <p14:section name="Basi e conversioni" id="{267d19d6-0252-9891-cd5e-5aeb80eb11e0}">
           <p14:sldIdLst>
             <p14:sldId id="258"/>
             <p14:sldId id="259"/>
@@ -140,14 +140,14 @@
             <p14:sldId id="261"/>
           </p14:sldIdLst>
         </p14:section>
-        <p14:section name="Numeri naturali e overflow" id="{9a24b5bf-1c44-abb7-c5e4-498e12dccd89}">
+        <p14:section name="Numeri naturali e overflow" id="{595d2e1e-1ea0-0bec-0aaf-1035bf6fcece}">
           <p14:sldIdLst>
             <p14:sldId id="262"/>
             <p14:sldId id="263"/>
             <p14:sldId id="264"/>
           </p14:sldIdLst>
         </p14:section>
-        <p14:section name="Interi con segno" id="{74b6827a-87dd-fdaa-aa6a-e76e12e0a5b2}">
+        <p14:section name="Interi con segno" id="{e9fd69b4-c4ba-894f-f2f7-600100b6652f}">
           <p14:sldIdLst>
             <p14:sldId id="265"/>
             <p14:sldId id="266"/>
@@ -157,7 +157,7 @@
             <p14:sldId id="270"/>
           </p14:sldIdLst>
         </p14:section>
-        <p14:section name="Ritorno alla macchina" id="{0e1d2a69-797e-81f3-593b-517a14842eb8}">
+        <p14:section name="Ritorno alla macchina" id="{10d9a8a1-8958-c6da-7785-66aa9c42c7e1}">
           <p14:sldIdLst>
             <p14:sldId id="271"/>
             <p14:sldId id="272"/>
@@ -571,6 +571,8 @@
             <a:r>
               <a:rPr lang="en-US" dirty="0"/>
               <a:t>Questa lezione avvia la trattazione formale dei numeri. Si apre con una piccola sorpresa sulla macchina, un segnalino che va a sinistra oltre lo zero e mostra FFFFFFFF, e si chiude spiegando esattamente perché accade. In mezzo imparate a convertire tra basi, a dire quali numeri stanno in un dato numero di bit, e a scrivere i numeri negativi. La citazione di Trilussa, l'Uno che discute con lo Zero, ricorda che in un sistema posizionale anche uno zero ha il suo peso.
+Stato di apprendimento: DA COMPRENDERE OGGI, alla fine di questa lezione lo spiegate, lo seguite passo passo e lo applicate da soli; DA UTILIZZARE OGGI, oggi seguite e usate la ricetta; come funziona dentro si spiega più avanti, o non fa parte del corso; DA COMPRENDERE PIÙ AVANTI, riconoscete il nome e lo scopo; lo spiega una lezione successiva. Una slide senza etichetta è contesto: una storia, un esempio, una domanda, un esercizio.
+Stato di apprendimento di questa lezione. DA COMPRENDERE OGGI: il complemento a due; i cambi di base; naturali e overflow; shift come moltiplicazione; segno e modulo; istruzioni con o senza segno; l'estensione del segno. DA UTILIZZARE OGGI: le chiamate del runtime PRG32, il programma completo, gli strumenti di PRG32 (si usa, non si studia, in questo corso). DA COMPRENDERE PIÙ AVANTI: niente. Una slide senza etichetta è contesto: una storia, un esempio, una domanda, un esercizio.
 Per il docente: Spirale: la lezione si apre con il segnalino del laboratorio 06 del libro di PRG32 che va a sinistra oltre lo zero, e si chiude spiegandolo.</a:t>
             </a:r>
             <a:endParaRPr lang="en-US" dirty="0"/>
@@ -660,6 +662,7 @@
             <a:r>
               <a:rPr lang="en-US" dirty="0"/>
               <a:t>L'idea più naturale: usare il bit più a sinistra per il segno e i bit restanti per il modulo. È facile da leggere per una persona, e ha due difetti. Lo zero ha due rappresentazioni, più zero e meno zero. E l'aritmetica è scomoda: per sommare due numeri di segno opposto il circuito deve confrontare i moduli, sottrarre il minore dal maggiore e scegliere il segno. Una rappresentazione che complica la somma è una legge scadente nel senso della sezione precedente.
+DA COMPRENDERE OGGI: segno e modulo.
 Per il docente: Semplice per le persone, scomodo per i circuiti. Sopravvive nella mantissa dei numeri in virgola mobile IEEE 754 (Lezione 06).</a:t>
             </a:r>
             <a:endParaRPr lang="en-US" dirty="0"/>
@@ -749,6 +752,7 @@
             <a:r>
               <a:rPr lang="en-US" dirty="0"/>
               <a:t>Il complemento a due. I numeri non negativi sono rappresentati da se stessi. Un numero negativo x è rappresentato da 2 alla n meno il suo modulo: su quattro bit, meno 3 è 16 meno 3, cioè 13, 1101. L'intervallo non è simmetrico: da meno 2 alla n meno 1 fino a 2 alla n meno 1, meno 1, quindi su quattro bit da meno 8 a più 7. Lo zero ha una sola rappresentazione, e il bit più a sinistra vale 1 esattamente quando il numero è negativo. Per un registro a 32 bit l'intervallo va da circa meno due miliardi a più due miliardi.
+DA COMPRENDERE OGGI: il complemento a due.
 Per il docente: Detto anche complemento alla base. L'asimmetria dell'intervallo (un negativo in più) ha una conseguenza: cambiare segno al numero più negativo dà overflow.</a:t>
             </a:r>
             <a:endParaRPr lang="en-US" dirty="0"/>
@@ -838,6 +842,7 @@
             <a:r>
               <a:rPr lang="en-US" dirty="0"/>
               <a:t>Le stesse sedici configurazioni lette in tre modi. Nella tabella di sinistra, dove il bit più a sinistra è 0, le tre letture coincidono. Nella tabella di destra differiscono: 1000 vale 8 senza segno, meno zero in segno e modulo, e meno 8 in complemento a due; 1111 vale 15, meno 7 oppure meno 1. La frase in fondo è la chiave di tutta la lezione: i bit non dicono quale colonna è quella giusta. Lo dice il programma, attraverso le istruzioni che sceglie.
+DA COMPRENDERE OGGI: il complemento a due.
 Per il docente: Evidenziati: 1000 è meno zero in segno e modulo ma -8 in complemento a due; 1111 è -7 oppure -1. Complemento a uno ed eccesso 8 si aggiungono a questa tabella nella Lezione 06.</a:t>
             </a:r>
             <a:endParaRPr lang="en-US" dirty="0"/>
@@ -927,6 +932,7 @@
             <a:r>
               <a:rPr lang="en-US" dirty="0"/>
               <a:t>Con n bit i numeri formano un cerchio: dopo l'ultima configurazione viene la prima. Sommare 1 sposta di un passo in senso orario. L'anello interno dà il valore senza segno, i dischi esterni il valore in complemento a due. La ruota «si spezza» in due punti diversi. Per la lettura senza segno la rottura è in alto, tra 1111 e 0000: attraversarla è un riporto. Per il complemento a due è in basso, tra 0111 e 1000: attraversarla è un overflow con segno. E un passo indietro da 0000 porta a 1111: è l'FFFFFFFF del riscaldamento.
+DA COMPRENDERE OGGI: il complemento a due.
 Per il docente: Anello interno: valore senza segno. In mezzo: i bit. Dischi esterni: valore in complemento a due. Lo stesso addizionatore serve entrambe le letture: cambia solo il punto in cui la ruota «si spezza».</a:t>
             </a:r>
             <a:endParaRPr lang="en-US" dirty="0"/>
@@ -1016,6 +1022,7 @@
             <a:r>
               <a:rPr lang="en-US" dirty="0"/>
               <a:t>Tre calcoli che mostrano il vantaggio del complemento a due. Per sommare 2 e meno 6 basta sommare le due configurazioni: 0010 più 1010 fa 1100, che si legge meno 4. Per sommare due negativi si sommano le configurazioni e si scarta il riporto uscente dalla posizione più a sinistra. Perfino il prodotto funziona sui quattro bit bassi. La prima riga dell'elenco è il punto: all'addizionatore non serve conoscere i segni. Il circuito che somma i numeri naturali dà già la risposta giusta per quelli con segno.
+DA COMPRENDERE OGGI: il complemento a due.
 Per il docente: Verifica del prodotto: 2 x 13 = 26 = 1 1010; i quattro bit bassi sono 1010, che si legge -6. Per questo RISC-V ha una sola mul per operandi con e senza segno.</a:t>
             </a:r>
             <a:endParaRPr lang="en-US" dirty="0"/>
@@ -1105,6 +1112,7 @@
             <a:r>
               <a:rPr lang="en-US" dirty="0"/>
               <a:t>Gli overflow sono due, e sono indipendenti. Per i numeri senza segno l'overflow è un riporto uscente dal bit più a sinistra: 128 più 130 su otto bit lascia 2 nel registro. Per i numeri con segno l'overflow è un risultato con il segno sbagliato: 127 più 127 non produce riporto uscente, ma la configurazione si legge meno 2. La regola: due operandi positivi che danno una somma negativa, o due negativi che danno una somma positiva. Due operandi di segno opposto non possono mai dare overflow, perché il risultato sta tra i due.
+DA COMPRENDERE OGGI: il complemento a due.
 Per il docente: Regola circuitale equivalente per l'overflow con segno: il riporto entrante nel bit più significativo è diverso da quello uscente.</a:t>
             </a:r>
             <a:endParaRPr lang="en-US" dirty="0"/>
@@ -1194,6 +1202,7 @@
             <a:r>
               <a:rPr lang="en-US" dirty="0"/>
               <a:t>Come si porta un numero su più bit senza cambiarne il valore? In complemento a due si copia il bit di segno in tutte le nuove posizioni: meno 1 su quattro bit, 1111, diventa 1111 1111 su otto; più 5, 0101, diventa 0000 0101. È l'estensione del segno. Il processore la esegue ogni volta che un valore corto ne incontra uno lungo: la costante a dodici bit di addi viene estesa con segno a trentadue bit, e lb estende il segno del byte che carica, mentre lbu riempie di zeri.
+DA COMPRENDERE OGGI: l'estensione del segno.
 Per il docente: Estendere con zeri trasformerebbe 1111 (-1) in 0000 1111 (+15). L'estensione del segno è la controparte con segno della proprietà di «estensione a sinistra» vista per i naturali.</a:t>
             </a:r>
             <a:endParaRPr lang="en-US" dirty="0"/>
@@ -1641,6 +1650,7 @@
             <a:r>
               <a:rPr lang="en-US" dirty="0"/>
               <a:t>Cinque conclusioni. Ogni base ha il suo uso: la due per i circuiti, la sedici per le persone che leggono i bit. Con n bit ci sono 2 alla n numeri, e la legge di codifica dice quali. Il complemento a due trasforma la sottrazione in addizione. L'overflow è il prezzo dei registri finiti: lo si rileva, oppure lo si esclude per progetto come con il clamp. E in RISC-V i bit non hanno tipo: sceglie l'istruzione. La prossima lezione completa il quadro con i numeri reali.
+Stato di apprendimento, riepilogo. DA COMPRENDERE OGGI: il complemento a due; i cambi di base; naturali e overflow; shift come moltiplicazione; segno e modulo; istruzioni con o senza segno; l'estensione del segno. DA UTILIZZARE OGGI: le chiamate del runtime PRG32, il programma completo, gli strumenti di PRG32 (si usa, non si studia, in questo corso). DA COMPRENDERE PIÙ AVANTI: niente. Una slide senza etichetta è contesto: una storia, un esempio, una domanda, un esercizio.
 Per il docente: Prossima lezione: complemento a uno, eccesso k, virgola fissa e virgola mobile IEEE 754.</a:t>
             </a:r>
             <a:endParaRPr lang="en-US" dirty="0"/>
@@ -1730,6 +1740,7 @@
             <a:r>
               <a:rPr lang="en-US" dirty="0"/>
               <a:t>Un sistema posizionale in base b usa b cifre, da 0 a b meno 1, e il valore di un numero è la somma di ogni cifra per la potenza di b che corrisponde alla sua posizione: la formula della didascalia. La tabella mostra il tredici in quattro basi: 1101 in binario, 15 in ottale, 13 in decimale, D in esadecimale. È sempre lo stesso numero: cambia solo la scrittura. Per una macchina la base 10 non ha alcuno statuto speciale; è la base di chi ha dieci dita.
+DA COMPRENDERE OGGI: i cambi di base.
 Per il docente: Un numero N è una stringa di cifre d(n-1) ... d(1) d(0), ciascuna minore della base b. Il valore è la somma di ogni cifra per la potenza della base corrispondente alla sua posizione.</a:t>
             </a:r>
             <a:endParaRPr lang="en-US" dirty="0"/>
@@ -1819,6 +1830,7 @@
             <a:r>
               <a:rPr lang="en-US" dirty="0"/>
               <a:t>Le basi che sono potenze di due condividono gli stessi bit. La slide prende 127, lo scrive in binario, e raggruppa i bit da destra: a quattro a quattro, ogni gruppo è una cifra esadecimale, e si ottiene 7F; a tre a tre, ogni gruppo è una cifra ottale, e si ottiene 177. Non serve alcuna divisione, solo una ricerca in tabella. Due dettagli: si raggruppa sempre da destra, dal lato meno significativo, e il gruppo più a sinistra, se incompleto, si completa con zeri.
+DA COMPRENDERE OGGI: i cambi di base.
 Per il docente: Si raggruppa da destra (dal lato meno significativo) e si completa con zeri a sinistra.</a:t>
             </a:r>
             <a:endParaRPr lang="en-US" dirty="0"/>
@@ -1908,6 +1920,7 @@
             <a:r>
               <a:rPr lang="en-US" dirty="0"/>
               <a:t>Per convertire un intero dalla base 10 alla base r si divide ripetutamente per r: ogni resto è una cifra, e il quoziente si divide di nuovo finché non diventa zero. Le tre tabelle lo fanno per 127 con r uguale a 8, 16 e 2. Il riquadro giallo contiene il dettaglio che si sbaglia più spesso: il primo resto è la cifra meno significativa, quindi i resti si leggono dal basso verso l'alto. Verifica: 177 in ottale è 64 + 56 + 7 = 127.
+DA COMPRENDERE OGGI: i cambi di base.
 Per il docente: N = Q(n) r^(n+1) + R(n) r^n + ... + R(1) r + R(0). In C le due operazioni sono / e %; in RISC-V (estensione M) sono divu e remu.</a:t>
             </a:r>
             <a:endParaRPr lang="en-US" dirty="0"/>
@@ -1997,6 +2010,7 @@
             <a:r>
               <a:rPr lang="en-US" dirty="0"/>
               <a:t>Per un numero tra 0 e 1 il procedimento è speculare: si moltiplica ripetutamente per r; ogni volta la parte intera del prodotto è una cifra, a partire dalla più significativa, e la parte frazionaria si moltiplica di nuovo. 0,875 dà 0,111 e si ferma, perché la frazione diventa zero. 0,8 non si ferma mai: tornano le stesse frazioni, e le cifre 1100 si ripetono all'infinito. Un numero finito in base dieci può essere periodico in base due, e con un numero finito di bit va troncato. È l'origine degli errori di arrotondamento della Lezione 06.
+DA COMPRENDERE OGGI: i cambi di base.
 Per il docente: N = R(1) r^-1 + R(2) r^-2 + ... Le slide originali rimandavano a due convertitori online (fermimn.edu.it e fauser.edu); qualunque calcolatrice moderna in modalità programmatore fa lo stesso.</a:t>
             </a:r>
             <a:endParaRPr lang="en-US" dirty="0"/>
@@ -2086,6 +2100,7 @@
             <a:r>
               <a:rPr lang="en-US" dirty="0"/>
               <a:t>Per i numeri naturali la legge è la più semplice possibile: X è x scritto in binario. Con n bit ci sono 2 alla n configurazioni, quindi i numeri vanno da 0 a 2 alla n meno 1: con quattro bit, da 0 a 15, come mostra la striscia. La tabella dà i casi che si incontrano su RISC-V: un byte arriva a 255, una halfword a 65.535, una parola a 4.294.967.295. Quest'ultimo è la lettura senza segno di FFFFFFFF: metà della risposta al riscaldamento.
+DA COMPRENDERE OGGI: naturali e overflow.
 Per il docente: 4.294.967.295 è la lettura senza segno di 0xFFFFFFFF: la prima metà della risposta al riscaldamento.</a:t>
             </a:r>
             <a:endParaRPr lang="en-US" dirty="0"/>
@@ -2174,7 +2189,8 @@
           <a:p>
             <a:r>
               <a:rPr lang="en-US" dirty="0"/>
-              <a:t>La definizione da ricordare. Un registro ha un numero finito di bit, quindi rappresenta un sottoinsieme finito di un insieme infinito di numeri. Le operazioni aritmetiche sono chiuse sull'insieme intero, non sul sottoinsieme: la somma di due numeri rappresentabili può cadere fuori. Quando accade si ha un overflow. L'esempio usa sette bit, che coprono da 0 a 127: 100 e 38 sono entrambi rappresentabili, e la loro somma, 138, no. L'overflow non è un difetto della macchina: è una conseguenza della finitezza.</a:t>
+              <a:t>La definizione da ricordare. Un registro ha un numero finito di bit, quindi rappresenta un sottoinsieme finito di un insieme infinito di numeri. Le operazioni aritmetiche sono chiuse sull'insieme intero, non sul sottoinsieme: la somma di due numeri rappresentabili può cadere fuori. Quando accade si ha un overflow. L'esempio usa sette bit, che coprono da 0 a 127: 100 e 38 sono entrambi rappresentabili, e la loro somma, 138, no. L'overflow non è un difetto della macchina: è una conseguenza della finitezza.
+DA COMPRENDERE OGGI: naturali e overflow.</a:t>
             </a:r>
             <a:endParaRPr lang="en-US" dirty="0"/>
           </a:p>
@@ -2263,6 +2279,7 @@
             <a:r>
               <a:rPr lang="en-US" dirty="0"/>
               <a:t>Quattro calcoli su quattro bit, svolti colonna per colonna come in decimale: 1 più 1 fa 0 con riporto di 1. Sei più otto ci sta. Quattordici più tre fa diciassette, che richiede un quinto bit: un overflow. La differenza usa il prestito come in decimale. Il prodotto di due numeri di n bit può richiedere 2n bit, ed è per questo che RISC-V ha due istruzioni: mul per la metà bassa del prodotto e mulhu per la metà alta. Rifate a mano i quattro calcoli, coprendo i risultati.
+DA COMPRENDERE OGGI: naturali e overflow.
 Per il docente: La slide originale diceva che l'overflow «si può rilevare mediante il bit di overflow»: vero per i processori con registro dei flag, non per RISC-V. Si veda l'ultima sezione.</a:t>
             </a:r>
             <a:endParaRPr lang="en-US" dirty="0"/>
@@ -3400,6 +3417,420 @@
       </p:pic>
       <p:sp>
         <p:nvSpPr>
+          <p:cNvPr id="15" name="Shape 12"/>
+          <p:cNvSpPr/>
+          <p:nvPr/>
+        </p:nvSpPr>
+        <p:spPr>
+          <a:xfrm>
+            <a:off x="8910777" y="91440"/>
+            <a:ext cx="2732278" cy="274320"/>
+          </a:xfrm>
+          <a:prstGeom prst="rect">
+            <a:avLst/>
+          </a:prstGeom>
+          <a:solidFill>
+            <a:srgbClr val="F3E8FF"/>
+          </a:solidFill>
+          <a:ln w="12700">
+            <a:solidFill>
+              <a:srgbClr val="7E22CE"/>
+            </a:solidFill>
+            <a:prstDash val="dash"/>
+          </a:ln>
+        </p:spPr>
+      </p:sp>
+      <p:sp>
+        <p:nvSpPr>
+          <p:cNvPr id="16" name="Shape 13"/>
+          <p:cNvSpPr/>
+          <p:nvPr/>
+        </p:nvSpPr>
+        <p:spPr>
+          <a:xfrm>
+            <a:off x="8938209" y="128016"/>
+            <a:ext cx="45720" cy="45720"/>
+          </a:xfrm>
+          <a:prstGeom prst="rect">
+            <a:avLst/>
+          </a:prstGeom>
+          <a:solidFill>
+            <a:srgbClr val="7E22CE"/>
+          </a:solidFill>
+          <a:ln w="12700">
+            <a:solidFill>
+              <a:srgbClr val="7E22CE"/>
+            </a:solidFill>
+            <a:prstDash val="solid"/>
+          </a:ln>
+        </p:spPr>
+      </p:sp>
+      <p:sp>
+        <p:nvSpPr>
+          <p:cNvPr id="17" name="Shape 14"/>
+          <p:cNvSpPr/>
+          <p:nvPr/>
+        </p:nvSpPr>
+        <p:spPr>
+          <a:xfrm>
+            <a:off x="8938209" y="205740"/>
+            <a:ext cx="45720" cy="45720"/>
+          </a:xfrm>
+          <a:prstGeom prst="rect">
+            <a:avLst/>
+          </a:prstGeom>
+          <a:solidFill>
+            <a:srgbClr val="7E22CE"/>
+          </a:solidFill>
+          <a:ln w="12700">
+            <a:solidFill>
+              <a:srgbClr val="7E22CE"/>
+            </a:solidFill>
+            <a:prstDash val="solid"/>
+          </a:ln>
+        </p:spPr>
+      </p:sp>
+      <p:sp>
+        <p:nvSpPr>
+          <p:cNvPr id="18" name="Shape 15"/>
+          <p:cNvSpPr/>
+          <p:nvPr/>
+        </p:nvSpPr>
+        <p:spPr>
+          <a:xfrm>
+            <a:off x="8938209" y="283464"/>
+            <a:ext cx="45720" cy="45720"/>
+          </a:xfrm>
+          <a:prstGeom prst="rect">
+            <a:avLst/>
+          </a:prstGeom>
+          <a:solidFill>
+            <a:srgbClr val="7E22CE"/>
+          </a:solidFill>
+          <a:ln w="12700">
+            <a:solidFill>
+              <a:srgbClr val="7E22CE"/>
+            </a:solidFill>
+            <a:prstDash val="solid"/>
+          </a:ln>
+        </p:spPr>
+      </p:sp>
+      <p:pic>
+        <p:nvPicPr>
+          <p:cNvPr id="19" name="Image 1" descr="preencoded.png">    </p:cNvPr>
+          <p:cNvPicPr>
+            <a:picLocks noChangeAspect="1"/>
+          </p:cNvPicPr>
+          <p:nvPr/>
+        </p:nvPicPr>
+        <p:blipFill>
+          <a:blip r:embed="rId2"/>
+          <a:stretch>
+            <a:fillRect/>
+          </a:stretch>
+        </p:blipFill>
+        <p:spPr>
+          <a:xfrm>
+            <a:off x="9038793" y="128016"/>
+            <a:ext cx="201168" cy="201168"/>
+          </a:xfrm>
+          <a:prstGeom prst="rect">
+            <a:avLst/>
+          </a:prstGeom>
+        </p:spPr>
+      </p:pic>
+      <p:sp>
+        <p:nvSpPr>
+          <p:cNvPr id="20" name="Text 16"/>
+          <p:cNvSpPr txBox="1"/>
+          <p:nvPr/>
+        </p:nvSpPr>
+        <p:spPr>
+          <a:xfrm>
+            <a:off x="9294825" y="91440"/>
+            <a:ext cx="2311654" cy="274320"/>
+          </a:xfrm>
+          <a:prstGeom prst="rect">
+            <a:avLst/>
+          </a:prstGeom>
+          <a:noFill/>
+          <a:ln/>
+        </p:spPr>
+        <p:txBody>
+          <a:bodyPr wrap="square" lIns="0" tIns="0" rIns="0" bIns="0" rtlCol="0" anchor="ctr"/>
+          <a:lstStyle/>
+          <a:p>
+            <a:pPr indent="0" marL="0">
+              <a:buNone/>
+            </a:pPr>
+            <a:r>
+              <a:rPr lang="en-US" sz="1100" b="1" dirty="0">
+                <a:solidFill>
+                  <a:srgbClr val="6B21A8"/>
+                </a:solidFill>
+                <a:latin typeface="Calibri" pitchFamily="34" charset="0"/>
+                <a:ea typeface="Calibri" pitchFamily="34" charset="-122"/>
+                <a:cs typeface="Calibri" pitchFamily="34" charset="-120"/>
+              </a:rPr>
+              <a:t>DA COMPRENDERE PIÙ AVANTI</a:t>
+            </a:r>
+            <a:endParaRPr lang="en-US" sz="1100" dirty="0"/>
+          </a:p>
+        </p:txBody>
+      </p:sp>
+      <p:sp>
+        <p:nvSpPr>
+          <p:cNvPr id="21" name="Shape 17"/>
+          <p:cNvSpPr/>
+          <p:nvPr/>
+        </p:nvSpPr>
+        <p:spPr>
+          <a:xfrm>
+            <a:off x="6675069" y="91440"/>
+            <a:ext cx="2125980" cy="274320"/>
+          </a:xfrm>
+          <a:prstGeom prst="rect">
+            <a:avLst/>
+          </a:prstGeom>
+          <a:solidFill>
+            <a:srgbClr val="FEF3C7"/>
+          </a:solidFill>
+          <a:ln w="12700">
+            <a:solidFill>
+              <a:srgbClr val="B45309"/>
+            </a:solidFill>
+            <a:prstDash val="solid"/>
+          </a:ln>
+        </p:spPr>
+      </p:sp>
+      <p:sp>
+        <p:nvSpPr>
+          <p:cNvPr id="22" name="Shape 18"/>
+          <p:cNvSpPr/>
+          <p:nvPr/>
+        </p:nvSpPr>
+        <p:spPr>
+          <a:xfrm>
+            <a:off x="6675069" y="91440"/>
+            <a:ext cx="27432" cy="274320"/>
+          </a:xfrm>
+          <a:prstGeom prst="rect">
+            <a:avLst/>
+          </a:prstGeom>
+          <a:solidFill>
+            <a:srgbClr val="B45309"/>
+          </a:solidFill>
+          <a:ln w="12700">
+            <a:solidFill>
+              <a:srgbClr val="B45309"/>
+            </a:solidFill>
+            <a:prstDash val="solid"/>
+          </a:ln>
+        </p:spPr>
+      </p:sp>
+      <p:sp>
+        <p:nvSpPr>
+          <p:cNvPr id="23" name="Shape 19"/>
+          <p:cNvSpPr/>
+          <p:nvPr/>
+        </p:nvSpPr>
+        <p:spPr>
+          <a:xfrm>
+            <a:off x="6729933" y="91440"/>
+            <a:ext cx="27432" cy="274320"/>
+          </a:xfrm>
+          <a:prstGeom prst="rect">
+            <a:avLst/>
+          </a:prstGeom>
+          <a:solidFill>
+            <a:srgbClr val="B45309"/>
+          </a:solidFill>
+          <a:ln w="12700">
+            <a:solidFill>
+              <a:srgbClr val="B45309"/>
+            </a:solidFill>
+            <a:prstDash val="solid"/>
+          </a:ln>
+        </p:spPr>
+      </p:sp>
+      <p:pic>
+        <p:nvPicPr>
+          <p:cNvPr id="24" name="Image 2" descr="preencoded.png">    </p:cNvPr>
+          <p:cNvPicPr>
+            <a:picLocks noChangeAspect="1"/>
+          </p:cNvPicPr>
+          <p:nvPr/>
+        </p:nvPicPr>
+        <p:blipFill>
+          <a:blip r:embed="rId3"/>
+          <a:stretch>
+            <a:fillRect/>
+          </a:stretch>
+        </p:blipFill>
+        <p:spPr>
+          <a:xfrm>
+            <a:off x="6803085" y="128016"/>
+            <a:ext cx="201168" cy="201168"/>
+          </a:xfrm>
+          <a:prstGeom prst="rect">
+            <a:avLst/>
+          </a:prstGeom>
+        </p:spPr>
+      </p:pic>
+      <p:sp>
+        <p:nvSpPr>
+          <p:cNvPr id="25" name="Text 20"/>
+          <p:cNvSpPr txBox="1"/>
+          <p:nvPr/>
+        </p:nvSpPr>
+        <p:spPr>
+          <a:xfrm>
+            <a:off x="7059117" y="91440"/>
+            <a:ext cx="1705356" cy="274320"/>
+          </a:xfrm>
+          <a:prstGeom prst="rect">
+            <a:avLst/>
+          </a:prstGeom>
+          <a:noFill/>
+          <a:ln/>
+        </p:spPr>
+        <p:txBody>
+          <a:bodyPr wrap="square" lIns="0" tIns="0" rIns="0" bIns="0" rtlCol="0" anchor="ctr"/>
+          <a:lstStyle/>
+          <a:p>
+            <a:pPr indent="0" marL="0">
+              <a:buNone/>
+            </a:pPr>
+            <a:r>
+              <a:rPr lang="en-US" sz="1100" b="1" dirty="0">
+                <a:solidFill>
+                  <a:srgbClr val="92400E"/>
+                </a:solidFill>
+                <a:latin typeface="Calibri" pitchFamily="34" charset="0"/>
+                <a:ea typeface="Calibri" pitchFamily="34" charset="-122"/>
+                <a:cs typeface="Calibri" pitchFamily="34" charset="-120"/>
+              </a:rPr>
+              <a:t>DA UTILIZZARE OGGI</a:t>
+            </a:r>
+            <a:endParaRPr lang="en-US" sz="1100" dirty="0"/>
+          </a:p>
+        </p:txBody>
+      </p:sp>
+      <p:sp>
+        <p:nvSpPr>
+          <p:cNvPr id="26" name="Shape 21"/>
+          <p:cNvSpPr/>
+          <p:nvPr/>
+        </p:nvSpPr>
+        <p:spPr>
+          <a:xfrm>
+            <a:off x="4352747" y="91440"/>
+            <a:ext cx="2212594" cy="274320"/>
+          </a:xfrm>
+          <a:prstGeom prst="rect">
+            <a:avLst/>
+          </a:prstGeom>
+          <a:solidFill>
+            <a:srgbClr val="E0F2FE"/>
+          </a:solidFill>
+          <a:ln w="12700">
+            <a:solidFill>
+              <a:srgbClr val="0369A1"/>
+            </a:solidFill>
+            <a:prstDash val="solid"/>
+          </a:ln>
+        </p:spPr>
+      </p:sp>
+      <p:sp>
+        <p:nvSpPr>
+          <p:cNvPr id="27" name="Shape 22"/>
+          <p:cNvSpPr/>
+          <p:nvPr/>
+        </p:nvSpPr>
+        <p:spPr>
+          <a:xfrm>
+            <a:off x="4352747" y="91440"/>
+            <a:ext cx="73152" cy="274320"/>
+          </a:xfrm>
+          <a:prstGeom prst="rect">
+            <a:avLst/>
+          </a:prstGeom>
+          <a:solidFill>
+            <a:srgbClr val="0369A1"/>
+          </a:solidFill>
+          <a:ln w="12700">
+            <a:solidFill>
+              <a:srgbClr val="0369A1"/>
+            </a:solidFill>
+            <a:prstDash val="solid"/>
+          </a:ln>
+        </p:spPr>
+      </p:sp>
+      <p:pic>
+        <p:nvPicPr>
+          <p:cNvPr id="28" name="Image 3" descr="preencoded.png">    </p:cNvPr>
+          <p:cNvPicPr>
+            <a:picLocks noChangeAspect="1"/>
+          </p:cNvPicPr>
+          <p:nvPr/>
+        </p:nvPicPr>
+        <p:blipFill>
+          <a:blip r:embed="rId4"/>
+          <a:stretch>
+            <a:fillRect/>
+          </a:stretch>
+        </p:blipFill>
+        <p:spPr>
+          <a:xfrm>
+            <a:off x="4480763" y="128016"/>
+            <a:ext cx="201168" cy="201168"/>
+          </a:xfrm>
+          <a:prstGeom prst="rect">
+            <a:avLst/>
+          </a:prstGeom>
+        </p:spPr>
+      </p:pic>
+      <p:sp>
+        <p:nvSpPr>
+          <p:cNvPr id="29" name="Text 23"/>
+          <p:cNvSpPr txBox="1"/>
+          <p:nvPr/>
+        </p:nvSpPr>
+        <p:spPr>
+          <a:xfrm>
+            <a:off x="4736795" y="91440"/>
+            <a:ext cx="1791970" cy="274320"/>
+          </a:xfrm>
+          <a:prstGeom prst="rect">
+            <a:avLst/>
+          </a:prstGeom>
+          <a:noFill/>
+          <a:ln/>
+        </p:spPr>
+        <p:txBody>
+          <a:bodyPr wrap="square" lIns="0" tIns="0" rIns="0" bIns="0" rtlCol="0" anchor="ctr"/>
+          <a:lstStyle/>
+          <a:p>
+            <a:pPr indent="0" marL="0">
+              <a:buNone/>
+            </a:pPr>
+            <a:r>
+              <a:rPr lang="en-US" sz="1100" b="1" dirty="0">
+                <a:solidFill>
+                  <a:srgbClr val="075985"/>
+                </a:solidFill>
+                <a:latin typeface="Calibri" pitchFamily="34" charset="0"/>
+                <a:ea typeface="Calibri" pitchFamily="34" charset="-122"/>
+                <a:cs typeface="Calibri" pitchFamily="34" charset="-120"/>
+              </a:rPr>
+              <a:t>DA COMPRENDERE OGGI</a:t>
+            </a:r>
+            <a:endParaRPr lang="en-US" sz="1100" dirty="0"/>
+          </a:p>
+        </p:txBody>
+      </p:sp>
+      <p:sp>
+        <p:nvSpPr>
           <p:cNvPr id="25" name="Slide Number Placeholder 0"/>
           <p:cNvSpPr>
             <a:spLocks noGrp="1"/>
@@ -3927,6 +4358,133 @@
       </p:sp>
       <p:sp>
         <p:nvSpPr>
+          <p:cNvPr id="14" name="Shape 12"/>
+          <p:cNvSpPr/>
+          <p:nvPr/>
+        </p:nvSpPr>
+        <p:spPr>
+          <a:xfrm>
+            <a:off x="8314258" y="91440"/>
+            <a:ext cx="3328797" cy="274320"/>
+          </a:xfrm>
+          <a:prstGeom prst="rect">
+            <a:avLst/>
+          </a:prstGeom>
+          <a:solidFill>
+            <a:srgbClr val="E0F2FE"/>
+          </a:solidFill>
+          <a:ln w="12700">
+            <a:solidFill>
+              <a:srgbClr val="0369A1"/>
+            </a:solidFill>
+            <a:prstDash val="solid"/>
+          </a:ln>
+        </p:spPr>
+      </p:sp>
+      <p:sp>
+        <p:nvSpPr>
+          <p:cNvPr id="15" name="Shape 13"/>
+          <p:cNvSpPr/>
+          <p:nvPr/>
+        </p:nvSpPr>
+        <p:spPr>
+          <a:xfrm>
+            <a:off x="8314258" y="91440"/>
+            <a:ext cx="73152" cy="274320"/>
+          </a:xfrm>
+          <a:prstGeom prst="rect">
+            <a:avLst/>
+          </a:prstGeom>
+          <a:solidFill>
+            <a:srgbClr val="0369A1"/>
+          </a:solidFill>
+          <a:ln w="12700">
+            <a:solidFill>
+              <a:srgbClr val="0369A1"/>
+            </a:solidFill>
+            <a:prstDash val="solid"/>
+          </a:ln>
+        </p:spPr>
+      </p:sp>
+      <p:pic>
+        <p:nvPicPr>
+          <p:cNvPr id="16" name="Image 0" descr="preencoded.png">    </p:cNvPr>
+          <p:cNvPicPr>
+            <a:picLocks noChangeAspect="1"/>
+          </p:cNvPicPr>
+          <p:nvPr/>
+        </p:nvPicPr>
+        <p:blipFill>
+          <a:blip r:embed="rId1"/>
+          <a:stretch>
+            <a:fillRect/>
+          </a:stretch>
+        </p:blipFill>
+        <p:spPr>
+          <a:xfrm>
+            <a:off x="8442274" y="128016"/>
+            <a:ext cx="201168" cy="201168"/>
+          </a:xfrm>
+          <a:prstGeom prst="rect">
+            <a:avLst/>
+          </a:prstGeom>
+        </p:spPr>
+      </p:pic>
+      <p:sp>
+        <p:nvSpPr>
+          <p:cNvPr id="17" name="Text 14"/>
+          <p:cNvSpPr txBox="1"/>
+          <p:nvPr/>
+        </p:nvSpPr>
+        <p:spPr>
+          <a:xfrm>
+            <a:off x="8698306" y="91440"/>
+            <a:ext cx="2908173" cy="274320"/>
+          </a:xfrm>
+          <a:prstGeom prst="rect">
+            <a:avLst/>
+          </a:prstGeom>
+          <a:noFill/>
+          <a:ln/>
+        </p:spPr>
+        <p:txBody>
+          <a:bodyPr wrap="square" lIns="0" tIns="0" rIns="0" bIns="0" rtlCol="0" anchor="ctr"/>
+          <a:lstStyle/>
+          <a:p>
+            <a:pPr indent="0" marL="0">
+              <a:buNone/>
+            </a:pPr>
+            <a:r>
+              <a:rPr lang="en-US" sz="1100" b="1" dirty="0">
+                <a:solidFill>
+                  <a:srgbClr val="075985"/>
+                </a:solidFill>
+                <a:latin typeface="Calibri" pitchFamily="34" charset="0"/>
+                <a:ea typeface="Calibri" pitchFamily="34" charset="-122"/>
+                <a:cs typeface="Calibri" pitchFamily="34" charset="-120"/>
+              </a:rPr>
+              <a:t>DA COMPRENDERE OGGI</a:t>
+            </a:r>
+            <a:pPr indent="0" marL="0">
+              <a:buNone/>
+            </a:pPr>
+            <a:r>
+              <a:rPr lang="en-US" sz="1100" dirty="0">
+                <a:solidFill>
+                  <a:srgbClr val="075985"/>
+                </a:solidFill>
+                <a:latin typeface="Calibri" pitchFamily="34" charset="0"/>
+                <a:ea typeface="Calibri" pitchFamily="34" charset="-122"/>
+                <a:cs typeface="Calibri" pitchFamily="34" charset="-120"/>
+              </a:rPr>
+              <a:t> · segno e modulo</a:t>
+            </a:r>
+            <a:endParaRPr lang="en-US" sz="1100" dirty="0"/>
+          </a:p>
+        </p:txBody>
+      </p:sp>
+      <p:sp>
+        <p:nvSpPr>
           <p:cNvPr id="25" name="Slide Number Placeholder 0"/>
           <p:cNvSpPr>
             <a:spLocks noGrp="1"/>
@@ -4476,6 +5034,133 @@
               <a:t>l'intervallo di un registro RISC-V a 32 bit letto come intero con segno: da circa meno due miliardi a più due miliardi</a:t>
             </a:r>
             <a:endParaRPr lang="en-US" sz="1800" dirty="0"/>
+          </a:p>
+        </p:txBody>
+      </p:sp>
+      <p:sp>
+        <p:nvSpPr>
+          <p:cNvPr id="16" name="Shape 14"/>
+          <p:cNvSpPr/>
+          <p:nvPr/>
+        </p:nvSpPr>
+        <p:spPr>
+          <a:xfrm>
+            <a:off x="7920304" y="91440"/>
+            <a:ext cx="3722751" cy="274320"/>
+          </a:xfrm>
+          <a:prstGeom prst="rect">
+            <a:avLst/>
+          </a:prstGeom>
+          <a:solidFill>
+            <a:srgbClr val="E0F2FE"/>
+          </a:solidFill>
+          <a:ln w="12700">
+            <a:solidFill>
+              <a:srgbClr val="0369A1"/>
+            </a:solidFill>
+            <a:prstDash val="solid"/>
+          </a:ln>
+        </p:spPr>
+      </p:sp>
+      <p:sp>
+        <p:nvSpPr>
+          <p:cNvPr id="17" name="Shape 15"/>
+          <p:cNvSpPr/>
+          <p:nvPr/>
+        </p:nvSpPr>
+        <p:spPr>
+          <a:xfrm>
+            <a:off x="7920304" y="91440"/>
+            <a:ext cx="73152" cy="274320"/>
+          </a:xfrm>
+          <a:prstGeom prst="rect">
+            <a:avLst/>
+          </a:prstGeom>
+          <a:solidFill>
+            <a:srgbClr val="0369A1"/>
+          </a:solidFill>
+          <a:ln w="12700">
+            <a:solidFill>
+              <a:srgbClr val="0369A1"/>
+            </a:solidFill>
+            <a:prstDash val="solid"/>
+          </a:ln>
+        </p:spPr>
+      </p:sp>
+      <p:pic>
+        <p:nvPicPr>
+          <p:cNvPr id="18" name="Image 0" descr="preencoded.png">    </p:cNvPr>
+          <p:cNvPicPr>
+            <a:picLocks noChangeAspect="1"/>
+          </p:cNvPicPr>
+          <p:nvPr/>
+        </p:nvPicPr>
+        <p:blipFill>
+          <a:blip r:embed="rId1"/>
+          <a:stretch>
+            <a:fillRect/>
+          </a:stretch>
+        </p:blipFill>
+        <p:spPr>
+          <a:xfrm>
+            <a:off x="8048320" y="128016"/>
+            <a:ext cx="201168" cy="201168"/>
+          </a:xfrm>
+          <a:prstGeom prst="rect">
+            <a:avLst/>
+          </a:prstGeom>
+        </p:spPr>
+      </p:pic>
+      <p:sp>
+        <p:nvSpPr>
+          <p:cNvPr id="19" name="Text 16"/>
+          <p:cNvSpPr txBox="1"/>
+          <p:nvPr/>
+        </p:nvSpPr>
+        <p:spPr>
+          <a:xfrm>
+            <a:off x="8304352" y="91440"/>
+            <a:ext cx="3302127" cy="274320"/>
+          </a:xfrm>
+          <a:prstGeom prst="rect">
+            <a:avLst/>
+          </a:prstGeom>
+          <a:noFill/>
+          <a:ln/>
+        </p:spPr>
+        <p:txBody>
+          <a:bodyPr wrap="square" lIns="0" tIns="0" rIns="0" bIns="0" rtlCol="0" anchor="ctr"/>
+          <a:lstStyle/>
+          <a:p>
+            <a:pPr indent="0" marL="0">
+              <a:buNone/>
+            </a:pPr>
+            <a:r>
+              <a:rPr lang="en-US" sz="1100" b="1" dirty="0">
+                <a:solidFill>
+                  <a:srgbClr val="075985"/>
+                </a:solidFill>
+                <a:latin typeface="Calibri" pitchFamily="34" charset="0"/>
+                <a:ea typeface="Calibri" pitchFamily="34" charset="-122"/>
+                <a:cs typeface="Calibri" pitchFamily="34" charset="-120"/>
+              </a:rPr>
+              <a:t>DA COMPRENDERE OGGI</a:t>
+            </a:r>
+            <a:pPr indent="0" marL="0">
+              <a:buNone/>
+            </a:pPr>
+            <a:r>
+              <a:rPr lang="en-US" sz="1100" dirty="0">
+                <a:solidFill>
+                  <a:srgbClr val="075985"/>
+                </a:solidFill>
+                <a:latin typeface="Calibri" pitchFamily="34" charset="0"/>
+                <a:ea typeface="Calibri" pitchFamily="34" charset="-122"/>
+                <a:cs typeface="Calibri" pitchFamily="34" charset="-120"/>
+              </a:rPr>
+              <a:t> · il complemento a due</a:t>
+            </a:r>
+            <a:endParaRPr lang="en-US" sz="1100" dirty="0"/>
           </a:p>
         </p:txBody>
       </p:sp>
@@ -9735,6 +10420,133 @@
       </p:sp>
       <p:sp>
         <p:nvSpPr>
+          <p:cNvPr id="9" name="Shape 5"/>
+          <p:cNvSpPr/>
+          <p:nvPr/>
+        </p:nvSpPr>
+        <p:spPr>
+          <a:xfrm>
+            <a:off x="7920304" y="91440"/>
+            <a:ext cx="3722751" cy="274320"/>
+          </a:xfrm>
+          <a:prstGeom prst="rect">
+            <a:avLst/>
+          </a:prstGeom>
+          <a:solidFill>
+            <a:srgbClr val="E0F2FE"/>
+          </a:solidFill>
+          <a:ln w="12700">
+            <a:solidFill>
+              <a:srgbClr val="0369A1"/>
+            </a:solidFill>
+            <a:prstDash val="solid"/>
+          </a:ln>
+        </p:spPr>
+      </p:sp>
+      <p:sp>
+        <p:nvSpPr>
+          <p:cNvPr id="10" name="Shape 6"/>
+          <p:cNvSpPr/>
+          <p:nvPr/>
+        </p:nvSpPr>
+        <p:spPr>
+          <a:xfrm>
+            <a:off x="7920304" y="91440"/>
+            <a:ext cx="73152" cy="274320"/>
+          </a:xfrm>
+          <a:prstGeom prst="rect">
+            <a:avLst/>
+          </a:prstGeom>
+          <a:solidFill>
+            <a:srgbClr val="0369A1"/>
+          </a:solidFill>
+          <a:ln w="12700">
+            <a:solidFill>
+              <a:srgbClr val="0369A1"/>
+            </a:solidFill>
+            <a:prstDash val="solid"/>
+          </a:ln>
+        </p:spPr>
+      </p:sp>
+      <p:pic>
+        <p:nvPicPr>
+          <p:cNvPr id="11" name="Image 0" descr="preencoded.png">    </p:cNvPr>
+          <p:cNvPicPr>
+            <a:picLocks noChangeAspect="1"/>
+          </p:cNvPicPr>
+          <p:nvPr/>
+        </p:nvPicPr>
+        <p:blipFill>
+          <a:blip r:embed="rId1"/>
+          <a:stretch>
+            <a:fillRect/>
+          </a:stretch>
+        </p:blipFill>
+        <p:spPr>
+          <a:xfrm>
+            <a:off x="8048320" y="128016"/>
+            <a:ext cx="201168" cy="201168"/>
+          </a:xfrm>
+          <a:prstGeom prst="rect">
+            <a:avLst/>
+          </a:prstGeom>
+        </p:spPr>
+      </p:pic>
+      <p:sp>
+        <p:nvSpPr>
+          <p:cNvPr id="12" name="Text 7"/>
+          <p:cNvSpPr txBox="1"/>
+          <p:nvPr/>
+        </p:nvSpPr>
+        <p:spPr>
+          <a:xfrm>
+            <a:off x="8304352" y="91440"/>
+            <a:ext cx="3302127" cy="274320"/>
+          </a:xfrm>
+          <a:prstGeom prst="rect">
+            <a:avLst/>
+          </a:prstGeom>
+          <a:noFill/>
+          <a:ln/>
+        </p:spPr>
+        <p:txBody>
+          <a:bodyPr wrap="square" lIns="0" tIns="0" rIns="0" bIns="0" rtlCol="0" anchor="ctr"/>
+          <a:lstStyle/>
+          <a:p>
+            <a:pPr indent="0" marL="0">
+              <a:buNone/>
+            </a:pPr>
+            <a:r>
+              <a:rPr lang="en-US" sz="1100" b="1" dirty="0">
+                <a:solidFill>
+                  <a:srgbClr val="075985"/>
+                </a:solidFill>
+                <a:latin typeface="Calibri" pitchFamily="34" charset="0"/>
+                <a:ea typeface="Calibri" pitchFamily="34" charset="-122"/>
+                <a:cs typeface="Calibri" pitchFamily="34" charset="-120"/>
+              </a:rPr>
+              <a:t>DA COMPRENDERE OGGI</a:t>
+            </a:r>
+            <a:pPr indent="0" marL="0">
+              <a:buNone/>
+            </a:pPr>
+            <a:r>
+              <a:rPr lang="en-US" sz="1100" dirty="0">
+                <a:solidFill>
+                  <a:srgbClr val="075985"/>
+                </a:solidFill>
+                <a:latin typeface="Calibri" pitchFamily="34" charset="0"/>
+                <a:ea typeface="Calibri" pitchFamily="34" charset="-122"/>
+                <a:cs typeface="Calibri" pitchFamily="34" charset="-120"/>
+              </a:rPr>
+              <a:t> · il complemento a due</a:t>
+            </a:r>
+            <a:endParaRPr lang="en-US" sz="1100" dirty="0"/>
+          </a:p>
+        </p:txBody>
+      </p:sp>
+      <p:sp>
+        <p:nvSpPr>
           <p:cNvPr id="25" name="Slide Number Placeholder 0"/>
           <p:cNvSpPr>
             <a:spLocks noGrp="1"/>
@@ -9847,9 +10659,59 @@
           </a:p>
         </p:txBody>
       </p:sp>
+      <p:sp>
+        <p:nvSpPr>
+          <p:cNvPr id="3" name="Shape 1"/>
+          <p:cNvSpPr/>
+          <p:nvPr/>
+        </p:nvSpPr>
+        <p:spPr>
+          <a:xfrm>
+            <a:off x="7920304" y="91440"/>
+            <a:ext cx="3722751" cy="274320"/>
+          </a:xfrm>
+          <a:prstGeom prst="rect">
+            <a:avLst/>
+          </a:prstGeom>
+          <a:solidFill>
+            <a:srgbClr val="E0F2FE"/>
+          </a:solidFill>
+          <a:ln w="12700">
+            <a:solidFill>
+              <a:srgbClr val="0369A1"/>
+            </a:solidFill>
+            <a:prstDash val="solid"/>
+          </a:ln>
+        </p:spPr>
+      </p:sp>
+      <p:sp>
+        <p:nvSpPr>
+          <p:cNvPr id="4" name="Shape 2"/>
+          <p:cNvSpPr/>
+          <p:nvPr/>
+        </p:nvSpPr>
+        <p:spPr>
+          <a:xfrm>
+            <a:off x="7920304" y="91440"/>
+            <a:ext cx="73152" cy="274320"/>
+          </a:xfrm>
+          <a:prstGeom prst="rect">
+            <a:avLst/>
+          </a:prstGeom>
+          <a:solidFill>
+            <a:srgbClr val="0369A1"/>
+          </a:solidFill>
+          <a:ln w="12700">
+            <a:solidFill>
+              <a:srgbClr val="0369A1"/>
+            </a:solidFill>
+            <a:prstDash val="solid"/>
+          </a:ln>
+        </p:spPr>
+      </p:sp>
       <p:pic>
         <p:nvPicPr>
-          <p:cNvPr id="4" name="Image 0" descr="preencoded.png">    </p:cNvPr>
+          <p:cNvPr id="5" name="Image 0" descr="preencoded.png">    </p:cNvPr>
           <p:cNvPicPr>
             <a:picLocks noChangeAspect="1"/>
           </p:cNvPicPr>
@@ -9863,6 +10725,83 @@
         </p:blipFill>
         <p:spPr>
           <a:xfrm>
+            <a:off x="8048320" y="128016"/>
+            <a:ext cx="201168" cy="201168"/>
+          </a:xfrm>
+          <a:prstGeom prst="rect">
+            <a:avLst/>
+          </a:prstGeom>
+        </p:spPr>
+      </p:pic>
+      <p:sp>
+        <p:nvSpPr>
+          <p:cNvPr id="6" name="Text 3"/>
+          <p:cNvSpPr txBox="1"/>
+          <p:nvPr/>
+        </p:nvSpPr>
+        <p:spPr>
+          <a:xfrm>
+            <a:off x="8304352" y="91440"/>
+            <a:ext cx="3302127" cy="274320"/>
+          </a:xfrm>
+          <a:prstGeom prst="rect">
+            <a:avLst/>
+          </a:prstGeom>
+          <a:noFill/>
+          <a:ln/>
+        </p:spPr>
+        <p:txBody>
+          <a:bodyPr wrap="square" lIns="0" tIns="0" rIns="0" bIns="0" rtlCol="0" anchor="ctr"/>
+          <a:lstStyle/>
+          <a:p>
+            <a:pPr indent="0" marL="0">
+              <a:buNone/>
+            </a:pPr>
+            <a:r>
+              <a:rPr lang="en-US" sz="1100" b="1" dirty="0">
+                <a:solidFill>
+                  <a:srgbClr val="075985"/>
+                </a:solidFill>
+                <a:latin typeface="Calibri" pitchFamily="34" charset="0"/>
+                <a:ea typeface="Calibri" pitchFamily="34" charset="-122"/>
+                <a:cs typeface="Calibri" pitchFamily="34" charset="-120"/>
+              </a:rPr>
+              <a:t>DA COMPRENDERE OGGI</a:t>
+            </a:r>
+            <a:pPr indent="0" marL="0">
+              <a:buNone/>
+            </a:pPr>
+            <a:r>
+              <a:rPr lang="en-US" sz="1100" dirty="0">
+                <a:solidFill>
+                  <a:srgbClr val="075985"/>
+                </a:solidFill>
+                <a:latin typeface="Calibri" pitchFamily="34" charset="0"/>
+                <a:ea typeface="Calibri" pitchFamily="34" charset="-122"/>
+                <a:cs typeface="Calibri" pitchFamily="34" charset="-120"/>
+              </a:rPr>
+              <a:t> · il complemento a due</a:t>
+            </a:r>
+            <a:endParaRPr lang="en-US" sz="1100" dirty="0"/>
+          </a:p>
+        </p:txBody>
+      </p:sp>
+      <p:pic>
+        <p:nvPicPr>
+          <p:cNvPr id="8" name="Image 1" descr="preencoded.png">    </p:cNvPr>
+          <p:cNvPicPr>
+            <a:picLocks noChangeAspect="1"/>
+          </p:cNvPicPr>
+          <p:nvPr/>
+        </p:nvPicPr>
+        <p:blipFill>
+          <a:blip r:embed="rId2"/>
+          <a:stretch>
+            <a:fillRect/>
+          </a:stretch>
+        </p:blipFill>
+        <p:spPr>
+          <a:xfrm>
             <a:off x="502920" y="1234440"/>
             <a:ext cx="5074920" cy="5074920"/>
           </a:xfrm>
@@ -9873,7 +10812,7 @@
       </p:pic>
       <p:sp>
         <p:nvSpPr>
-          <p:cNvPr id="5" name="Shape 1"/>
+          <p:cNvPr id="9" name="Shape 4"/>
           <p:cNvSpPr/>
           <p:nvPr/>
         </p:nvSpPr>
@@ -9898,7 +10837,7 @@
       </p:sp>
       <p:sp>
         <p:nvSpPr>
-          <p:cNvPr id="6" name="Text 2"/>
+          <p:cNvPr id="10" name="Text 5"/>
           <p:cNvSpPr txBox="1"/>
           <p:nvPr/>
         </p:nvSpPr>
@@ -9940,7 +10879,7 @@
       </p:sp>
       <p:sp>
         <p:nvSpPr>
-          <p:cNvPr id="7" name="Shape 3"/>
+          <p:cNvPr id="11" name="Shape 6"/>
           <p:cNvSpPr/>
           <p:nvPr/>
         </p:nvSpPr>
@@ -9965,7 +10904,7 @@
       </p:sp>
       <p:sp>
         <p:nvSpPr>
-          <p:cNvPr id="8" name="Text 4"/>
+          <p:cNvPr id="12" name="Text 7"/>
           <p:cNvSpPr txBox="1"/>
           <p:nvPr/>
         </p:nvSpPr>
@@ -10007,7 +10946,7 @@
       </p:sp>
       <p:sp>
         <p:nvSpPr>
-          <p:cNvPr id="9" name="Shape 5"/>
+          <p:cNvPr id="13" name="Shape 8"/>
           <p:cNvSpPr/>
           <p:nvPr/>
         </p:nvSpPr>
@@ -10032,7 +10971,7 @@
       </p:sp>
       <p:sp>
         <p:nvSpPr>
-          <p:cNvPr id="10" name="Text 6"/>
+          <p:cNvPr id="14" name="Text 9"/>
           <p:cNvSpPr txBox="1"/>
           <p:nvPr/>
         </p:nvSpPr>
@@ -10094,7 +11033,7 @@
       </p:sp>
       <p:sp>
         <p:nvSpPr>
-          <p:cNvPr id="11" name="Shape 7"/>
+          <p:cNvPr id="15" name="Shape 10"/>
           <p:cNvSpPr/>
           <p:nvPr/>
         </p:nvSpPr>
@@ -10119,7 +11058,7 @@
       </p:sp>
       <p:sp>
         <p:nvSpPr>
-          <p:cNvPr id="12" name="Text 8"/>
+          <p:cNvPr id="16" name="Text 11"/>
           <p:cNvSpPr txBox="1"/>
           <p:nvPr/>
         </p:nvSpPr>
@@ -10181,7 +11120,7 @@
       </p:sp>
       <p:sp>
         <p:nvSpPr>
-          <p:cNvPr id="13" name="Shape 9"/>
+          <p:cNvPr id="17" name="Shape 12"/>
           <p:cNvSpPr/>
           <p:nvPr/>
         </p:nvSpPr>
@@ -10206,7 +11145,7 @@
       </p:sp>
       <p:sp>
         <p:nvSpPr>
-          <p:cNvPr id="14" name="Text 10"/>
+          <p:cNvPr id="18" name="Text 13"/>
           <p:cNvSpPr txBox="1"/>
           <p:nvPr/>
         </p:nvSpPr>
@@ -11316,6 +12255,133 @@
       </p:sp>
       <p:sp>
         <p:nvSpPr>
+          <p:cNvPr id="24" name="Shape 22"/>
+          <p:cNvSpPr/>
+          <p:nvPr/>
+        </p:nvSpPr>
+        <p:spPr>
+          <a:xfrm>
+            <a:off x="7920304" y="91440"/>
+            <a:ext cx="3722751" cy="274320"/>
+          </a:xfrm>
+          <a:prstGeom prst="rect">
+            <a:avLst/>
+          </a:prstGeom>
+          <a:solidFill>
+            <a:srgbClr val="E0F2FE"/>
+          </a:solidFill>
+          <a:ln w="12700">
+            <a:solidFill>
+              <a:srgbClr val="0369A1"/>
+            </a:solidFill>
+            <a:prstDash val="solid"/>
+          </a:ln>
+        </p:spPr>
+      </p:sp>
+      <p:sp>
+        <p:nvSpPr>
+          <p:cNvPr id="25" name="Shape 23"/>
+          <p:cNvSpPr/>
+          <p:nvPr/>
+        </p:nvSpPr>
+        <p:spPr>
+          <a:xfrm>
+            <a:off x="7920304" y="91440"/>
+            <a:ext cx="73152" cy="274320"/>
+          </a:xfrm>
+          <a:prstGeom prst="rect">
+            <a:avLst/>
+          </a:prstGeom>
+          <a:solidFill>
+            <a:srgbClr val="0369A1"/>
+          </a:solidFill>
+          <a:ln w="12700">
+            <a:solidFill>
+              <a:srgbClr val="0369A1"/>
+            </a:solidFill>
+            <a:prstDash val="solid"/>
+          </a:ln>
+        </p:spPr>
+      </p:sp>
+      <p:pic>
+        <p:nvPicPr>
+          <p:cNvPr id="26" name="Image 0" descr="preencoded.png">    </p:cNvPr>
+          <p:cNvPicPr>
+            <a:picLocks noChangeAspect="1"/>
+          </p:cNvPicPr>
+          <p:nvPr/>
+        </p:nvPicPr>
+        <p:blipFill>
+          <a:blip r:embed="rId1"/>
+          <a:stretch>
+            <a:fillRect/>
+          </a:stretch>
+        </p:blipFill>
+        <p:spPr>
+          <a:xfrm>
+            <a:off x="8048320" y="128016"/>
+            <a:ext cx="201168" cy="201168"/>
+          </a:xfrm>
+          <a:prstGeom prst="rect">
+            <a:avLst/>
+          </a:prstGeom>
+        </p:spPr>
+      </p:pic>
+      <p:sp>
+        <p:nvSpPr>
+          <p:cNvPr id="27" name="Text 24"/>
+          <p:cNvSpPr txBox="1"/>
+          <p:nvPr/>
+        </p:nvSpPr>
+        <p:spPr>
+          <a:xfrm>
+            <a:off x="8304352" y="91440"/>
+            <a:ext cx="3302127" cy="274320"/>
+          </a:xfrm>
+          <a:prstGeom prst="rect">
+            <a:avLst/>
+          </a:prstGeom>
+          <a:noFill/>
+          <a:ln/>
+        </p:spPr>
+        <p:txBody>
+          <a:bodyPr wrap="square" lIns="0" tIns="0" rIns="0" bIns="0" rtlCol="0" anchor="ctr"/>
+          <a:lstStyle/>
+          <a:p>
+            <a:pPr indent="0" marL="0">
+              <a:buNone/>
+            </a:pPr>
+            <a:r>
+              <a:rPr lang="en-US" sz="1100" b="1" dirty="0">
+                <a:solidFill>
+                  <a:srgbClr val="075985"/>
+                </a:solidFill>
+                <a:latin typeface="Calibri" pitchFamily="34" charset="0"/>
+                <a:ea typeface="Calibri" pitchFamily="34" charset="-122"/>
+                <a:cs typeface="Calibri" pitchFamily="34" charset="-120"/>
+              </a:rPr>
+              <a:t>DA COMPRENDERE OGGI</a:t>
+            </a:r>
+            <a:pPr indent="0" marL="0">
+              <a:buNone/>
+            </a:pPr>
+            <a:r>
+              <a:rPr lang="en-US" sz="1100" dirty="0">
+                <a:solidFill>
+                  <a:srgbClr val="075985"/>
+                </a:solidFill>
+                <a:latin typeface="Calibri" pitchFamily="34" charset="0"/>
+                <a:ea typeface="Calibri" pitchFamily="34" charset="-122"/>
+                <a:cs typeface="Calibri" pitchFamily="34" charset="-120"/>
+              </a:rPr>
+              <a:t> · il complemento a due</a:t>
+            </a:r>
+            <a:endParaRPr lang="en-US" sz="1100" dirty="0"/>
+          </a:p>
+        </p:txBody>
+      </p:sp>
+      <p:sp>
+        <p:nvSpPr>
           <p:cNvPr id="25" name="Slide Number Placeholder 0"/>
           <p:cNvSpPr>
             <a:spLocks noGrp="1"/>
@@ -12240,6 +13306,133 @@
       </p:sp>
       <p:sp>
         <p:nvSpPr>
+          <p:cNvPr id="21" name="Shape 19"/>
+          <p:cNvSpPr/>
+          <p:nvPr/>
+        </p:nvSpPr>
+        <p:spPr>
+          <a:xfrm>
+            <a:off x="7920304" y="91440"/>
+            <a:ext cx="3722751" cy="274320"/>
+          </a:xfrm>
+          <a:prstGeom prst="rect">
+            <a:avLst/>
+          </a:prstGeom>
+          <a:solidFill>
+            <a:srgbClr val="E0F2FE"/>
+          </a:solidFill>
+          <a:ln w="12700">
+            <a:solidFill>
+              <a:srgbClr val="0369A1"/>
+            </a:solidFill>
+            <a:prstDash val="solid"/>
+          </a:ln>
+        </p:spPr>
+      </p:sp>
+      <p:sp>
+        <p:nvSpPr>
+          <p:cNvPr id="22" name="Shape 20"/>
+          <p:cNvSpPr/>
+          <p:nvPr/>
+        </p:nvSpPr>
+        <p:spPr>
+          <a:xfrm>
+            <a:off x="7920304" y="91440"/>
+            <a:ext cx="73152" cy="274320"/>
+          </a:xfrm>
+          <a:prstGeom prst="rect">
+            <a:avLst/>
+          </a:prstGeom>
+          <a:solidFill>
+            <a:srgbClr val="0369A1"/>
+          </a:solidFill>
+          <a:ln w="12700">
+            <a:solidFill>
+              <a:srgbClr val="0369A1"/>
+            </a:solidFill>
+            <a:prstDash val="solid"/>
+          </a:ln>
+        </p:spPr>
+      </p:sp>
+      <p:pic>
+        <p:nvPicPr>
+          <p:cNvPr id="23" name="Image 0" descr="preencoded.png">    </p:cNvPr>
+          <p:cNvPicPr>
+            <a:picLocks noChangeAspect="1"/>
+          </p:cNvPicPr>
+          <p:nvPr/>
+        </p:nvPicPr>
+        <p:blipFill>
+          <a:blip r:embed="rId1"/>
+          <a:stretch>
+            <a:fillRect/>
+          </a:stretch>
+        </p:blipFill>
+        <p:spPr>
+          <a:xfrm>
+            <a:off x="8048320" y="128016"/>
+            <a:ext cx="201168" cy="201168"/>
+          </a:xfrm>
+          <a:prstGeom prst="rect">
+            <a:avLst/>
+          </a:prstGeom>
+        </p:spPr>
+      </p:pic>
+      <p:sp>
+        <p:nvSpPr>
+          <p:cNvPr id="24" name="Text 21"/>
+          <p:cNvSpPr txBox="1"/>
+          <p:nvPr/>
+        </p:nvSpPr>
+        <p:spPr>
+          <a:xfrm>
+            <a:off x="8304352" y="91440"/>
+            <a:ext cx="3302127" cy="274320"/>
+          </a:xfrm>
+          <a:prstGeom prst="rect">
+            <a:avLst/>
+          </a:prstGeom>
+          <a:noFill/>
+          <a:ln/>
+        </p:spPr>
+        <p:txBody>
+          <a:bodyPr wrap="square" lIns="0" tIns="0" rIns="0" bIns="0" rtlCol="0" anchor="ctr"/>
+          <a:lstStyle/>
+          <a:p>
+            <a:pPr indent="0" marL="0">
+              <a:buNone/>
+            </a:pPr>
+            <a:r>
+              <a:rPr lang="en-US" sz="1100" b="1" dirty="0">
+                <a:solidFill>
+                  <a:srgbClr val="075985"/>
+                </a:solidFill>
+                <a:latin typeface="Calibri" pitchFamily="34" charset="0"/>
+                <a:ea typeface="Calibri" pitchFamily="34" charset="-122"/>
+                <a:cs typeface="Calibri" pitchFamily="34" charset="-120"/>
+              </a:rPr>
+              <a:t>DA COMPRENDERE OGGI</a:t>
+            </a:r>
+            <a:pPr indent="0" marL="0">
+              <a:buNone/>
+            </a:pPr>
+            <a:r>
+              <a:rPr lang="en-US" sz="1100" dirty="0">
+                <a:solidFill>
+                  <a:srgbClr val="075985"/>
+                </a:solidFill>
+                <a:latin typeface="Calibri" pitchFamily="34" charset="0"/>
+                <a:ea typeface="Calibri" pitchFamily="34" charset="-122"/>
+                <a:cs typeface="Calibri" pitchFamily="34" charset="-120"/>
+              </a:rPr>
+              <a:t> · il complemento a due</a:t>
+            </a:r>
+            <a:endParaRPr lang="en-US" sz="1100" dirty="0"/>
+          </a:p>
+        </p:txBody>
+      </p:sp>
+      <p:sp>
+        <p:nvSpPr>
           <p:cNvPr id="25" name="Slide Number Placeholder 0"/>
           <p:cNvSpPr>
             <a:spLocks noGrp="1"/>
@@ -13132,6 +14325,133 @@
               <a:t>lb estende il segno del byte che carica; lbu riempie di zeri: si sceglie in base a ciò che il byte significa</a:t>
             </a:r>
             <a:endParaRPr lang="en-US" sz="1500" dirty="0"/>
+          </a:p>
+        </p:txBody>
+      </p:sp>
+      <p:sp>
+        <p:nvSpPr>
+          <p:cNvPr id="23" name="Shape 21"/>
+          <p:cNvSpPr/>
+          <p:nvPr/>
+        </p:nvSpPr>
+        <p:spPr>
+          <a:xfrm>
+            <a:off x="7788986" y="91440"/>
+            <a:ext cx="3854069" cy="274320"/>
+          </a:xfrm>
+          <a:prstGeom prst="rect">
+            <a:avLst/>
+          </a:prstGeom>
+          <a:solidFill>
+            <a:srgbClr val="E0F2FE"/>
+          </a:solidFill>
+          <a:ln w="12700">
+            <a:solidFill>
+              <a:srgbClr val="0369A1"/>
+            </a:solidFill>
+            <a:prstDash val="solid"/>
+          </a:ln>
+        </p:spPr>
+      </p:sp>
+      <p:sp>
+        <p:nvSpPr>
+          <p:cNvPr id="24" name="Shape 22"/>
+          <p:cNvSpPr/>
+          <p:nvPr/>
+        </p:nvSpPr>
+        <p:spPr>
+          <a:xfrm>
+            <a:off x="7788986" y="91440"/>
+            <a:ext cx="73152" cy="274320"/>
+          </a:xfrm>
+          <a:prstGeom prst="rect">
+            <a:avLst/>
+          </a:prstGeom>
+          <a:solidFill>
+            <a:srgbClr val="0369A1"/>
+          </a:solidFill>
+          <a:ln w="12700">
+            <a:solidFill>
+              <a:srgbClr val="0369A1"/>
+            </a:solidFill>
+            <a:prstDash val="solid"/>
+          </a:ln>
+        </p:spPr>
+      </p:sp>
+      <p:pic>
+        <p:nvPicPr>
+          <p:cNvPr id="25" name="Image 0" descr="preencoded.png">    </p:cNvPr>
+          <p:cNvPicPr>
+            <a:picLocks noChangeAspect="1"/>
+          </p:cNvPicPr>
+          <p:nvPr/>
+        </p:nvPicPr>
+        <p:blipFill>
+          <a:blip r:embed="rId1"/>
+          <a:stretch>
+            <a:fillRect/>
+          </a:stretch>
+        </p:blipFill>
+        <p:spPr>
+          <a:xfrm>
+            <a:off x="7917002" y="128016"/>
+            <a:ext cx="201168" cy="201168"/>
+          </a:xfrm>
+          <a:prstGeom prst="rect">
+            <a:avLst/>
+          </a:prstGeom>
+        </p:spPr>
+      </p:pic>
+      <p:sp>
+        <p:nvSpPr>
+          <p:cNvPr id="26" name="Text 23"/>
+          <p:cNvSpPr txBox="1"/>
+          <p:nvPr/>
+        </p:nvSpPr>
+        <p:spPr>
+          <a:xfrm>
+            <a:off x="8173034" y="91440"/>
+            <a:ext cx="3433445" cy="274320"/>
+          </a:xfrm>
+          <a:prstGeom prst="rect">
+            <a:avLst/>
+          </a:prstGeom>
+          <a:noFill/>
+          <a:ln/>
+        </p:spPr>
+        <p:txBody>
+          <a:bodyPr wrap="square" lIns="0" tIns="0" rIns="0" bIns="0" rtlCol="0" anchor="ctr"/>
+          <a:lstStyle/>
+          <a:p>
+            <a:pPr indent="0" marL="0">
+              <a:buNone/>
+            </a:pPr>
+            <a:r>
+              <a:rPr lang="en-US" sz="1100" b="1" dirty="0">
+                <a:solidFill>
+                  <a:srgbClr val="075985"/>
+                </a:solidFill>
+                <a:latin typeface="Calibri" pitchFamily="34" charset="0"/>
+                <a:ea typeface="Calibri" pitchFamily="34" charset="-122"/>
+                <a:cs typeface="Calibri" pitchFamily="34" charset="-120"/>
+              </a:rPr>
+              <a:t>DA COMPRENDERE OGGI</a:t>
+            </a:r>
+            <a:pPr indent="0" marL="0">
+              <a:buNone/>
+            </a:pPr>
+            <a:r>
+              <a:rPr lang="en-US" sz="1100" dirty="0">
+                <a:solidFill>
+                  <a:srgbClr val="075985"/>
+                </a:solidFill>
+                <a:latin typeface="Calibri" pitchFamily="34" charset="0"/>
+                <a:ea typeface="Calibri" pitchFamily="34" charset="-122"/>
+                <a:cs typeface="Calibri" pitchFamily="34" charset="-120"/>
+              </a:rPr>
+              <a:t> · l'estensione del segno</a:t>
+            </a:r>
+            <a:endParaRPr lang="en-US" sz="1100" dirty="0"/>
           </a:p>
         </p:txBody>
       </p:sp>
@@ -20360,6 +21680,133 @@
       </p:sp>
       <p:sp>
         <p:nvSpPr>
+          <p:cNvPr id="5" name="Shape 2"/>
+          <p:cNvSpPr/>
+          <p:nvPr/>
+        </p:nvSpPr>
+        <p:spPr>
+          <a:xfrm>
+            <a:off x="8248599" y="91440"/>
+            <a:ext cx="3394456" cy="274320"/>
+          </a:xfrm>
+          <a:prstGeom prst="rect">
+            <a:avLst/>
+          </a:prstGeom>
+          <a:solidFill>
+            <a:srgbClr val="E0F2FE"/>
+          </a:solidFill>
+          <a:ln w="12700">
+            <a:solidFill>
+              <a:srgbClr val="0369A1"/>
+            </a:solidFill>
+            <a:prstDash val="solid"/>
+          </a:ln>
+        </p:spPr>
+      </p:sp>
+      <p:sp>
+        <p:nvSpPr>
+          <p:cNvPr id="6" name="Shape 3"/>
+          <p:cNvSpPr/>
+          <p:nvPr/>
+        </p:nvSpPr>
+        <p:spPr>
+          <a:xfrm>
+            <a:off x="8248599" y="91440"/>
+            <a:ext cx="73152" cy="274320"/>
+          </a:xfrm>
+          <a:prstGeom prst="rect">
+            <a:avLst/>
+          </a:prstGeom>
+          <a:solidFill>
+            <a:srgbClr val="0369A1"/>
+          </a:solidFill>
+          <a:ln w="12700">
+            <a:solidFill>
+              <a:srgbClr val="0369A1"/>
+            </a:solidFill>
+            <a:prstDash val="solid"/>
+          </a:ln>
+        </p:spPr>
+      </p:sp>
+      <p:pic>
+        <p:nvPicPr>
+          <p:cNvPr id="7" name="Image 0" descr="preencoded.png">    </p:cNvPr>
+          <p:cNvPicPr>
+            <a:picLocks noChangeAspect="1"/>
+          </p:cNvPicPr>
+          <p:nvPr/>
+        </p:nvPicPr>
+        <p:blipFill>
+          <a:blip r:embed="rId1"/>
+          <a:stretch>
+            <a:fillRect/>
+          </a:stretch>
+        </p:blipFill>
+        <p:spPr>
+          <a:xfrm>
+            <a:off x="8376615" y="128016"/>
+            <a:ext cx="201168" cy="201168"/>
+          </a:xfrm>
+          <a:prstGeom prst="rect">
+            <a:avLst/>
+          </a:prstGeom>
+        </p:spPr>
+      </p:pic>
+      <p:sp>
+        <p:nvSpPr>
+          <p:cNvPr id="8" name="Text 4"/>
+          <p:cNvSpPr txBox="1"/>
+          <p:nvPr/>
+        </p:nvSpPr>
+        <p:spPr>
+          <a:xfrm>
+            <a:off x="8632647" y="91440"/>
+            <a:ext cx="2973832" cy="274320"/>
+          </a:xfrm>
+          <a:prstGeom prst="rect">
+            <a:avLst/>
+          </a:prstGeom>
+          <a:noFill/>
+          <a:ln/>
+        </p:spPr>
+        <p:txBody>
+          <a:bodyPr wrap="square" lIns="0" tIns="0" rIns="0" bIns="0" rtlCol="0" anchor="ctr"/>
+          <a:lstStyle/>
+          <a:p>
+            <a:pPr indent="0" marL="0">
+              <a:buNone/>
+            </a:pPr>
+            <a:r>
+              <a:rPr lang="en-US" sz="1100" b="1" dirty="0">
+                <a:solidFill>
+                  <a:srgbClr val="075985"/>
+                </a:solidFill>
+                <a:latin typeface="Calibri" pitchFamily="34" charset="0"/>
+                <a:ea typeface="Calibri" pitchFamily="34" charset="-122"/>
+                <a:cs typeface="Calibri" pitchFamily="34" charset="-120"/>
+              </a:rPr>
+              <a:t>DA COMPRENDERE OGGI</a:t>
+            </a:r>
+            <a:pPr indent="0" marL="0">
+              <a:buNone/>
+            </a:pPr>
+            <a:r>
+              <a:rPr lang="en-US" sz="1100" dirty="0">
+                <a:solidFill>
+                  <a:srgbClr val="075985"/>
+                </a:solidFill>
+                <a:latin typeface="Calibri" pitchFamily="34" charset="0"/>
+                <a:ea typeface="Calibri" pitchFamily="34" charset="-122"/>
+                <a:cs typeface="Calibri" pitchFamily="34" charset="-120"/>
+              </a:rPr>
+              <a:t> · i cambi di base</a:t>
+            </a:r>
+            <a:endParaRPr lang="en-US" sz="1100" dirty="0"/>
+          </a:p>
+        </p:txBody>
+      </p:sp>
+      <p:sp>
+        <p:nvSpPr>
           <p:cNvPr id="25" name="Slide Number Placeholder 0"/>
           <p:cNvSpPr>
             <a:spLocks noGrp="1"/>
@@ -21315,6 +22762,133 @@
               <a:t>Se ogni cifra è scritta in binario puro, i bit di un numero sono gli stessi in ogni base b = 2^k: si raggruppano da destra, k alla volta. Esempio: 13 = 1101 in binario = 15 in ottale = D in esadecimale.</a:t>
             </a:r>
             <a:endParaRPr lang="en-US" sz="1650" dirty="0"/>
+          </a:p>
+        </p:txBody>
+      </p:sp>
+      <p:sp>
+        <p:nvSpPr>
+          <p:cNvPr id="23" name="Shape 21"/>
+          <p:cNvSpPr/>
+          <p:nvPr/>
+        </p:nvSpPr>
+        <p:spPr>
+          <a:xfrm>
+            <a:off x="8248599" y="91440"/>
+            <a:ext cx="3394456" cy="274320"/>
+          </a:xfrm>
+          <a:prstGeom prst="rect">
+            <a:avLst/>
+          </a:prstGeom>
+          <a:solidFill>
+            <a:srgbClr val="E0F2FE"/>
+          </a:solidFill>
+          <a:ln w="12700">
+            <a:solidFill>
+              <a:srgbClr val="0369A1"/>
+            </a:solidFill>
+            <a:prstDash val="solid"/>
+          </a:ln>
+        </p:spPr>
+      </p:sp>
+      <p:sp>
+        <p:nvSpPr>
+          <p:cNvPr id="24" name="Shape 22"/>
+          <p:cNvSpPr/>
+          <p:nvPr/>
+        </p:nvSpPr>
+        <p:spPr>
+          <a:xfrm>
+            <a:off x="8248599" y="91440"/>
+            <a:ext cx="73152" cy="274320"/>
+          </a:xfrm>
+          <a:prstGeom prst="rect">
+            <a:avLst/>
+          </a:prstGeom>
+          <a:solidFill>
+            <a:srgbClr val="0369A1"/>
+          </a:solidFill>
+          <a:ln w="12700">
+            <a:solidFill>
+              <a:srgbClr val="0369A1"/>
+            </a:solidFill>
+            <a:prstDash val="solid"/>
+          </a:ln>
+        </p:spPr>
+      </p:sp>
+      <p:pic>
+        <p:nvPicPr>
+          <p:cNvPr id="25" name="Image 0" descr="preencoded.png">    </p:cNvPr>
+          <p:cNvPicPr>
+            <a:picLocks noChangeAspect="1"/>
+          </p:cNvPicPr>
+          <p:nvPr/>
+        </p:nvPicPr>
+        <p:blipFill>
+          <a:blip r:embed="rId1"/>
+          <a:stretch>
+            <a:fillRect/>
+          </a:stretch>
+        </p:blipFill>
+        <p:spPr>
+          <a:xfrm>
+            <a:off x="8376615" y="128016"/>
+            <a:ext cx="201168" cy="201168"/>
+          </a:xfrm>
+          <a:prstGeom prst="rect">
+            <a:avLst/>
+          </a:prstGeom>
+        </p:spPr>
+      </p:pic>
+      <p:sp>
+        <p:nvSpPr>
+          <p:cNvPr id="26" name="Text 23"/>
+          <p:cNvSpPr txBox="1"/>
+          <p:nvPr/>
+        </p:nvSpPr>
+        <p:spPr>
+          <a:xfrm>
+            <a:off x="8632647" y="91440"/>
+            <a:ext cx="2973832" cy="274320"/>
+          </a:xfrm>
+          <a:prstGeom prst="rect">
+            <a:avLst/>
+          </a:prstGeom>
+          <a:noFill/>
+          <a:ln/>
+        </p:spPr>
+        <p:txBody>
+          <a:bodyPr wrap="square" lIns="0" tIns="0" rIns="0" bIns="0" rtlCol="0" anchor="ctr"/>
+          <a:lstStyle/>
+          <a:p>
+            <a:pPr indent="0" marL="0">
+              <a:buNone/>
+            </a:pPr>
+            <a:r>
+              <a:rPr lang="en-US" sz="1100" b="1" dirty="0">
+                <a:solidFill>
+                  <a:srgbClr val="075985"/>
+                </a:solidFill>
+                <a:latin typeface="Calibri" pitchFamily="34" charset="0"/>
+                <a:ea typeface="Calibri" pitchFamily="34" charset="-122"/>
+                <a:cs typeface="Calibri" pitchFamily="34" charset="-120"/>
+              </a:rPr>
+              <a:t>DA COMPRENDERE OGGI</a:t>
+            </a:r>
+            <a:pPr indent="0" marL="0">
+              <a:buNone/>
+            </a:pPr>
+            <a:r>
+              <a:rPr lang="en-US" sz="1100" dirty="0">
+                <a:solidFill>
+                  <a:srgbClr val="075985"/>
+                </a:solidFill>
+                <a:latin typeface="Calibri" pitchFamily="34" charset="0"/>
+                <a:ea typeface="Calibri" pitchFamily="34" charset="-122"/>
+                <a:cs typeface="Calibri" pitchFamily="34" charset="-120"/>
+              </a:rPr>
+              <a:t> · i cambi di base</a:t>
+            </a:r>
+            <a:endParaRPr lang="en-US" sz="1100" dirty="0"/>
           </a:p>
         </p:txBody>
       </p:sp>
@@ -24956,6 +26530,133 @@
       </p:sp>
       <p:sp>
         <p:nvSpPr>
+          <p:cNvPr id="15" name="Shape 10"/>
+          <p:cNvSpPr/>
+          <p:nvPr/>
+        </p:nvSpPr>
+        <p:spPr>
+          <a:xfrm>
+            <a:off x="8248599" y="91440"/>
+            <a:ext cx="3394456" cy="274320"/>
+          </a:xfrm>
+          <a:prstGeom prst="rect">
+            <a:avLst/>
+          </a:prstGeom>
+          <a:solidFill>
+            <a:srgbClr val="E0F2FE"/>
+          </a:solidFill>
+          <a:ln w="12700">
+            <a:solidFill>
+              <a:srgbClr val="0369A1"/>
+            </a:solidFill>
+            <a:prstDash val="solid"/>
+          </a:ln>
+        </p:spPr>
+      </p:sp>
+      <p:sp>
+        <p:nvSpPr>
+          <p:cNvPr id="16" name="Shape 11"/>
+          <p:cNvSpPr/>
+          <p:nvPr/>
+        </p:nvSpPr>
+        <p:spPr>
+          <a:xfrm>
+            <a:off x="8248599" y="91440"/>
+            <a:ext cx="73152" cy="274320"/>
+          </a:xfrm>
+          <a:prstGeom prst="rect">
+            <a:avLst/>
+          </a:prstGeom>
+          <a:solidFill>
+            <a:srgbClr val="0369A1"/>
+          </a:solidFill>
+          <a:ln w="12700">
+            <a:solidFill>
+              <a:srgbClr val="0369A1"/>
+            </a:solidFill>
+            <a:prstDash val="solid"/>
+          </a:ln>
+        </p:spPr>
+      </p:sp>
+      <p:pic>
+        <p:nvPicPr>
+          <p:cNvPr id="17" name="Image 0" descr="preencoded.png">    </p:cNvPr>
+          <p:cNvPicPr>
+            <a:picLocks noChangeAspect="1"/>
+          </p:cNvPicPr>
+          <p:nvPr/>
+        </p:nvPicPr>
+        <p:blipFill>
+          <a:blip r:embed="rId1"/>
+          <a:stretch>
+            <a:fillRect/>
+          </a:stretch>
+        </p:blipFill>
+        <p:spPr>
+          <a:xfrm>
+            <a:off x="8376615" y="128016"/>
+            <a:ext cx="201168" cy="201168"/>
+          </a:xfrm>
+          <a:prstGeom prst="rect">
+            <a:avLst/>
+          </a:prstGeom>
+        </p:spPr>
+      </p:pic>
+      <p:sp>
+        <p:nvSpPr>
+          <p:cNvPr id="18" name="Text 12"/>
+          <p:cNvSpPr txBox="1"/>
+          <p:nvPr/>
+        </p:nvSpPr>
+        <p:spPr>
+          <a:xfrm>
+            <a:off x="8632647" y="91440"/>
+            <a:ext cx="2973832" cy="274320"/>
+          </a:xfrm>
+          <a:prstGeom prst="rect">
+            <a:avLst/>
+          </a:prstGeom>
+          <a:noFill/>
+          <a:ln/>
+        </p:spPr>
+        <p:txBody>
+          <a:bodyPr wrap="square" lIns="0" tIns="0" rIns="0" bIns="0" rtlCol="0" anchor="ctr"/>
+          <a:lstStyle/>
+          <a:p>
+            <a:pPr indent="0" marL="0">
+              <a:buNone/>
+            </a:pPr>
+            <a:r>
+              <a:rPr lang="en-US" sz="1100" b="1" dirty="0">
+                <a:solidFill>
+                  <a:srgbClr val="075985"/>
+                </a:solidFill>
+                <a:latin typeface="Calibri" pitchFamily="34" charset="0"/>
+                <a:ea typeface="Calibri" pitchFamily="34" charset="-122"/>
+                <a:cs typeface="Calibri" pitchFamily="34" charset="-120"/>
+              </a:rPr>
+              <a:t>DA COMPRENDERE OGGI</a:t>
+            </a:r>
+            <a:pPr indent="0" marL="0">
+              <a:buNone/>
+            </a:pPr>
+            <a:r>
+              <a:rPr lang="en-US" sz="1100" dirty="0">
+                <a:solidFill>
+                  <a:srgbClr val="075985"/>
+                </a:solidFill>
+                <a:latin typeface="Calibri" pitchFamily="34" charset="0"/>
+                <a:ea typeface="Calibri" pitchFamily="34" charset="-122"/>
+                <a:cs typeface="Calibri" pitchFamily="34" charset="-120"/>
+              </a:rPr>
+              <a:t> · i cambi di base</a:t>
+            </a:r>
+            <a:endParaRPr lang="en-US" sz="1100" dirty="0"/>
+          </a:p>
+        </p:txBody>
+      </p:sp>
+      <p:sp>
+        <p:nvSpPr>
           <p:cNvPr id="25" name="Slide Number Placeholder 0"/>
           <p:cNvSpPr>
             <a:spLocks noGrp="1"/>
@@ -27448,6 +29149,133 @@
               <a:t>Una frazione finita in base 10 può essere periodica in base 2. Con un numero finito di bit va troncata: da qui nascono gli errori di approssimazione dei numeri reali (Lezione 06).</a:t>
             </a:r>
             <a:endParaRPr lang="en-US" sz="1650" dirty="0"/>
+          </a:p>
+        </p:txBody>
+      </p:sp>
+      <p:sp>
+        <p:nvSpPr>
+          <p:cNvPr id="12" name="Shape 8"/>
+          <p:cNvSpPr/>
+          <p:nvPr/>
+        </p:nvSpPr>
+        <p:spPr>
+          <a:xfrm>
+            <a:off x="8248599" y="91440"/>
+            <a:ext cx="3394456" cy="274320"/>
+          </a:xfrm>
+          <a:prstGeom prst="rect">
+            <a:avLst/>
+          </a:prstGeom>
+          <a:solidFill>
+            <a:srgbClr val="E0F2FE"/>
+          </a:solidFill>
+          <a:ln w="12700">
+            <a:solidFill>
+              <a:srgbClr val="0369A1"/>
+            </a:solidFill>
+            <a:prstDash val="solid"/>
+          </a:ln>
+        </p:spPr>
+      </p:sp>
+      <p:sp>
+        <p:nvSpPr>
+          <p:cNvPr id="13" name="Shape 9"/>
+          <p:cNvSpPr/>
+          <p:nvPr/>
+        </p:nvSpPr>
+        <p:spPr>
+          <a:xfrm>
+            <a:off x="8248599" y="91440"/>
+            <a:ext cx="73152" cy="274320"/>
+          </a:xfrm>
+          <a:prstGeom prst="rect">
+            <a:avLst/>
+          </a:prstGeom>
+          <a:solidFill>
+            <a:srgbClr val="0369A1"/>
+          </a:solidFill>
+          <a:ln w="12700">
+            <a:solidFill>
+              <a:srgbClr val="0369A1"/>
+            </a:solidFill>
+            <a:prstDash val="solid"/>
+          </a:ln>
+        </p:spPr>
+      </p:sp>
+      <p:pic>
+        <p:nvPicPr>
+          <p:cNvPr id="14" name="Image 0" descr="preencoded.png">    </p:cNvPr>
+          <p:cNvPicPr>
+            <a:picLocks noChangeAspect="1"/>
+          </p:cNvPicPr>
+          <p:nvPr/>
+        </p:nvPicPr>
+        <p:blipFill>
+          <a:blip r:embed="rId1"/>
+          <a:stretch>
+            <a:fillRect/>
+          </a:stretch>
+        </p:blipFill>
+        <p:spPr>
+          <a:xfrm>
+            <a:off x="8376615" y="128016"/>
+            <a:ext cx="201168" cy="201168"/>
+          </a:xfrm>
+          <a:prstGeom prst="rect">
+            <a:avLst/>
+          </a:prstGeom>
+        </p:spPr>
+      </p:pic>
+      <p:sp>
+        <p:nvSpPr>
+          <p:cNvPr id="15" name="Text 10"/>
+          <p:cNvSpPr txBox="1"/>
+          <p:nvPr/>
+        </p:nvSpPr>
+        <p:spPr>
+          <a:xfrm>
+            <a:off x="8632647" y="91440"/>
+            <a:ext cx="2973832" cy="274320"/>
+          </a:xfrm>
+          <a:prstGeom prst="rect">
+            <a:avLst/>
+          </a:prstGeom>
+          <a:noFill/>
+          <a:ln/>
+        </p:spPr>
+        <p:txBody>
+          <a:bodyPr wrap="square" lIns="0" tIns="0" rIns="0" bIns="0" rtlCol="0" anchor="ctr"/>
+          <a:lstStyle/>
+          <a:p>
+            <a:pPr indent="0" marL="0">
+              <a:buNone/>
+            </a:pPr>
+            <a:r>
+              <a:rPr lang="en-US" sz="1100" b="1" dirty="0">
+                <a:solidFill>
+                  <a:srgbClr val="075985"/>
+                </a:solidFill>
+                <a:latin typeface="Calibri" pitchFamily="34" charset="0"/>
+                <a:ea typeface="Calibri" pitchFamily="34" charset="-122"/>
+                <a:cs typeface="Calibri" pitchFamily="34" charset="-120"/>
+              </a:rPr>
+              <a:t>DA COMPRENDERE OGGI</a:t>
+            </a:r>
+            <a:pPr indent="0" marL="0">
+              <a:buNone/>
+            </a:pPr>
+            <a:r>
+              <a:rPr lang="en-US" sz="1100" dirty="0">
+                <a:solidFill>
+                  <a:srgbClr val="075985"/>
+                </a:solidFill>
+                <a:latin typeface="Calibri" pitchFamily="34" charset="0"/>
+                <a:ea typeface="Calibri" pitchFamily="34" charset="-122"/>
+                <a:cs typeface="Calibri" pitchFamily="34" charset="-120"/>
+              </a:rPr>
+              <a:t> · i cambi di base</a:t>
+            </a:r>
+            <a:endParaRPr lang="en-US" sz="1100" dirty="0"/>
           </a:p>
         </p:txBody>
       </p:sp>
@@ -30212,6 +32040,133 @@
       </p:graphicFrame>
       <p:sp>
         <p:nvSpPr>
+          <p:cNvPr id="41" name="Shape 38"/>
+          <p:cNvSpPr/>
+          <p:nvPr/>
+        </p:nvSpPr>
+        <p:spPr>
+          <a:xfrm>
+            <a:off x="7985963" y="91440"/>
+            <a:ext cx="3657092" cy="274320"/>
+          </a:xfrm>
+          <a:prstGeom prst="rect">
+            <a:avLst/>
+          </a:prstGeom>
+          <a:solidFill>
+            <a:srgbClr val="E0F2FE"/>
+          </a:solidFill>
+          <a:ln w="12700">
+            <a:solidFill>
+              <a:srgbClr val="0369A1"/>
+            </a:solidFill>
+            <a:prstDash val="solid"/>
+          </a:ln>
+        </p:spPr>
+      </p:sp>
+      <p:sp>
+        <p:nvSpPr>
+          <p:cNvPr id="42" name="Shape 39"/>
+          <p:cNvSpPr/>
+          <p:nvPr/>
+        </p:nvSpPr>
+        <p:spPr>
+          <a:xfrm>
+            <a:off x="7985963" y="91440"/>
+            <a:ext cx="73152" cy="274320"/>
+          </a:xfrm>
+          <a:prstGeom prst="rect">
+            <a:avLst/>
+          </a:prstGeom>
+          <a:solidFill>
+            <a:srgbClr val="0369A1"/>
+          </a:solidFill>
+          <a:ln w="12700">
+            <a:solidFill>
+              <a:srgbClr val="0369A1"/>
+            </a:solidFill>
+            <a:prstDash val="solid"/>
+          </a:ln>
+        </p:spPr>
+      </p:sp>
+      <p:pic>
+        <p:nvPicPr>
+          <p:cNvPr id="43" name="Image 0" descr="preencoded.png">    </p:cNvPr>
+          <p:cNvPicPr>
+            <a:picLocks noChangeAspect="1"/>
+          </p:cNvPicPr>
+          <p:nvPr/>
+        </p:nvPicPr>
+        <p:blipFill>
+          <a:blip r:embed="rId1"/>
+          <a:stretch>
+            <a:fillRect/>
+          </a:stretch>
+        </p:blipFill>
+        <p:spPr>
+          <a:xfrm>
+            <a:off x="8113979" y="128016"/>
+            <a:ext cx="201168" cy="201168"/>
+          </a:xfrm>
+          <a:prstGeom prst="rect">
+            <a:avLst/>
+          </a:prstGeom>
+        </p:spPr>
+      </p:pic>
+      <p:sp>
+        <p:nvSpPr>
+          <p:cNvPr id="44" name="Text 40"/>
+          <p:cNvSpPr txBox="1"/>
+          <p:nvPr/>
+        </p:nvSpPr>
+        <p:spPr>
+          <a:xfrm>
+            <a:off x="8370011" y="91440"/>
+            <a:ext cx="3236468" cy="274320"/>
+          </a:xfrm>
+          <a:prstGeom prst="rect">
+            <a:avLst/>
+          </a:prstGeom>
+          <a:noFill/>
+          <a:ln/>
+        </p:spPr>
+        <p:txBody>
+          <a:bodyPr wrap="square" lIns="0" tIns="0" rIns="0" bIns="0" rtlCol="0" anchor="ctr"/>
+          <a:lstStyle/>
+          <a:p>
+            <a:pPr indent="0" marL="0">
+              <a:buNone/>
+            </a:pPr>
+            <a:r>
+              <a:rPr lang="en-US" sz="1100" b="1" dirty="0">
+                <a:solidFill>
+                  <a:srgbClr val="075985"/>
+                </a:solidFill>
+                <a:latin typeface="Calibri" pitchFamily="34" charset="0"/>
+                <a:ea typeface="Calibri" pitchFamily="34" charset="-122"/>
+                <a:cs typeface="Calibri" pitchFamily="34" charset="-120"/>
+              </a:rPr>
+              <a:t>DA COMPRENDERE OGGI</a:t>
+            </a:r>
+            <a:pPr indent="0" marL="0">
+              <a:buNone/>
+            </a:pPr>
+            <a:r>
+              <a:rPr lang="en-US" sz="1100" dirty="0">
+                <a:solidFill>
+                  <a:srgbClr val="075985"/>
+                </a:solidFill>
+                <a:latin typeface="Calibri" pitchFamily="34" charset="0"/>
+                <a:ea typeface="Calibri" pitchFamily="34" charset="-122"/>
+                <a:cs typeface="Calibri" pitchFamily="34" charset="-120"/>
+              </a:rPr>
+              <a:t> · naturali e overflow</a:t>
+            </a:r>
+            <a:endParaRPr lang="en-US" sz="1100" dirty="0"/>
+          </a:p>
+        </p:txBody>
+      </p:sp>
+      <p:sp>
+        <p:nvSpPr>
           <p:cNvPr id="25" name="Slide Number Placeholder 0"/>
           <p:cNvSpPr>
             <a:spLocks noGrp="1"/>
@@ -30699,6 +32654,133 @@
       </p:sp>
       <p:sp>
         <p:nvSpPr>
+          <p:cNvPr id="14" name="Shape 12"/>
+          <p:cNvSpPr/>
+          <p:nvPr/>
+        </p:nvSpPr>
+        <p:spPr>
+          <a:xfrm>
+            <a:off x="7985963" y="91440"/>
+            <a:ext cx="3657092" cy="274320"/>
+          </a:xfrm>
+          <a:prstGeom prst="rect">
+            <a:avLst/>
+          </a:prstGeom>
+          <a:solidFill>
+            <a:srgbClr val="E0F2FE"/>
+          </a:solidFill>
+          <a:ln w="12700">
+            <a:solidFill>
+              <a:srgbClr val="0369A1"/>
+            </a:solidFill>
+            <a:prstDash val="solid"/>
+          </a:ln>
+        </p:spPr>
+      </p:sp>
+      <p:sp>
+        <p:nvSpPr>
+          <p:cNvPr id="15" name="Shape 13"/>
+          <p:cNvSpPr/>
+          <p:nvPr/>
+        </p:nvSpPr>
+        <p:spPr>
+          <a:xfrm>
+            <a:off x="7985963" y="91440"/>
+            <a:ext cx="73152" cy="274320"/>
+          </a:xfrm>
+          <a:prstGeom prst="rect">
+            <a:avLst/>
+          </a:prstGeom>
+          <a:solidFill>
+            <a:srgbClr val="0369A1"/>
+          </a:solidFill>
+          <a:ln w="12700">
+            <a:solidFill>
+              <a:srgbClr val="0369A1"/>
+            </a:solidFill>
+            <a:prstDash val="solid"/>
+          </a:ln>
+        </p:spPr>
+      </p:sp>
+      <p:pic>
+        <p:nvPicPr>
+          <p:cNvPr id="16" name="Image 0" descr="preencoded.png">    </p:cNvPr>
+          <p:cNvPicPr>
+            <a:picLocks noChangeAspect="1"/>
+          </p:cNvPicPr>
+          <p:nvPr/>
+        </p:nvPicPr>
+        <p:blipFill>
+          <a:blip r:embed="rId1"/>
+          <a:stretch>
+            <a:fillRect/>
+          </a:stretch>
+        </p:blipFill>
+        <p:spPr>
+          <a:xfrm>
+            <a:off x="8113979" y="128016"/>
+            <a:ext cx="201168" cy="201168"/>
+          </a:xfrm>
+          <a:prstGeom prst="rect">
+            <a:avLst/>
+          </a:prstGeom>
+        </p:spPr>
+      </p:pic>
+      <p:sp>
+        <p:nvSpPr>
+          <p:cNvPr id="17" name="Text 14"/>
+          <p:cNvSpPr txBox="1"/>
+          <p:nvPr/>
+        </p:nvSpPr>
+        <p:spPr>
+          <a:xfrm>
+            <a:off x="8370011" y="91440"/>
+            <a:ext cx="3236468" cy="274320"/>
+          </a:xfrm>
+          <a:prstGeom prst="rect">
+            <a:avLst/>
+          </a:prstGeom>
+          <a:noFill/>
+          <a:ln/>
+        </p:spPr>
+        <p:txBody>
+          <a:bodyPr wrap="square" lIns="0" tIns="0" rIns="0" bIns="0" rtlCol="0" anchor="ctr"/>
+          <a:lstStyle/>
+          <a:p>
+            <a:pPr indent="0" marL="0">
+              <a:buNone/>
+            </a:pPr>
+            <a:r>
+              <a:rPr lang="en-US" sz="1100" b="1" dirty="0">
+                <a:solidFill>
+                  <a:srgbClr val="075985"/>
+                </a:solidFill>
+                <a:latin typeface="Calibri" pitchFamily="34" charset="0"/>
+                <a:ea typeface="Calibri" pitchFamily="34" charset="-122"/>
+                <a:cs typeface="Calibri" pitchFamily="34" charset="-120"/>
+              </a:rPr>
+              <a:t>DA COMPRENDERE OGGI</a:t>
+            </a:r>
+            <a:pPr indent="0" marL="0">
+              <a:buNone/>
+            </a:pPr>
+            <a:r>
+              <a:rPr lang="en-US" sz="1100" dirty="0">
+                <a:solidFill>
+                  <a:srgbClr val="075985"/>
+                </a:solidFill>
+                <a:latin typeface="Calibri" pitchFamily="34" charset="0"/>
+                <a:ea typeface="Calibri" pitchFamily="34" charset="-122"/>
+                <a:cs typeface="Calibri" pitchFamily="34" charset="-120"/>
+              </a:rPr>
+              <a:t> · naturali e overflow</a:t>
+            </a:r>
+            <a:endParaRPr lang="en-US" sz="1100" dirty="0"/>
+          </a:p>
+        </p:txBody>
+      </p:sp>
+      <p:sp>
+        <p:nvSpPr>
           <p:cNvPr id="25" name="Slide Number Placeholder 0"/>
           <p:cNvSpPr>
             <a:spLocks noGrp="1"/>
@@ -32013,6 +34095,133 @@
               <a:t>Un prodotto richiede il doppio dei bit: su RV32 mul dà i 32 bit bassi e mulhu i 32 alti</a:t>
             </a:r>
             <a:endParaRPr lang="en-US" sz="2200" dirty="0"/>
+          </a:p>
+        </p:txBody>
+      </p:sp>
+      <p:sp>
+        <p:nvSpPr>
+          <p:cNvPr id="29" name="Shape 27"/>
+          <p:cNvSpPr/>
+          <p:nvPr/>
+        </p:nvSpPr>
+        <p:spPr>
+          <a:xfrm>
+            <a:off x="7985963" y="91440"/>
+            <a:ext cx="3657092" cy="274320"/>
+          </a:xfrm>
+          <a:prstGeom prst="rect">
+            <a:avLst/>
+          </a:prstGeom>
+          <a:solidFill>
+            <a:srgbClr val="E0F2FE"/>
+          </a:solidFill>
+          <a:ln w="12700">
+            <a:solidFill>
+              <a:srgbClr val="0369A1"/>
+            </a:solidFill>
+            <a:prstDash val="solid"/>
+          </a:ln>
+        </p:spPr>
+      </p:sp>
+      <p:sp>
+        <p:nvSpPr>
+          <p:cNvPr id="30" name="Shape 28"/>
+          <p:cNvSpPr/>
+          <p:nvPr/>
+        </p:nvSpPr>
+        <p:spPr>
+          <a:xfrm>
+            <a:off x="7985963" y="91440"/>
+            <a:ext cx="73152" cy="274320"/>
+          </a:xfrm>
+          <a:prstGeom prst="rect">
+            <a:avLst/>
+          </a:prstGeom>
+          <a:solidFill>
+            <a:srgbClr val="0369A1"/>
+          </a:solidFill>
+          <a:ln w="12700">
+            <a:solidFill>
+              <a:srgbClr val="0369A1"/>
+            </a:solidFill>
+            <a:prstDash val="solid"/>
+          </a:ln>
+        </p:spPr>
+      </p:sp>
+      <p:pic>
+        <p:nvPicPr>
+          <p:cNvPr id="31" name="Image 0" descr="preencoded.png">    </p:cNvPr>
+          <p:cNvPicPr>
+            <a:picLocks noChangeAspect="1"/>
+          </p:cNvPicPr>
+          <p:nvPr/>
+        </p:nvPicPr>
+        <p:blipFill>
+          <a:blip r:embed="rId1"/>
+          <a:stretch>
+            <a:fillRect/>
+          </a:stretch>
+        </p:blipFill>
+        <p:spPr>
+          <a:xfrm>
+            <a:off x="8113979" y="128016"/>
+            <a:ext cx="201168" cy="201168"/>
+          </a:xfrm>
+          <a:prstGeom prst="rect">
+            <a:avLst/>
+          </a:prstGeom>
+        </p:spPr>
+      </p:pic>
+      <p:sp>
+        <p:nvSpPr>
+          <p:cNvPr id="32" name="Text 29"/>
+          <p:cNvSpPr txBox="1"/>
+          <p:nvPr/>
+        </p:nvSpPr>
+        <p:spPr>
+          <a:xfrm>
+            <a:off x="8370011" y="91440"/>
+            <a:ext cx="3236468" cy="274320"/>
+          </a:xfrm>
+          <a:prstGeom prst="rect">
+            <a:avLst/>
+          </a:prstGeom>
+          <a:noFill/>
+          <a:ln/>
+        </p:spPr>
+        <p:txBody>
+          <a:bodyPr wrap="square" lIns="0" tIns="0" rIns="0" bIns="0" rtlCol="0" anchor="ctr"/>
+          <a:lstStyle/>
+          <a:p>
+            <a:pPr indent="0" marL="0">
+              <a:buNone/>
+            </a:pPr>
+            <a:r>
+              <a:rPr lang="en-US" sz="1100" b="1" dirty="0">
+                <a:solidFill>
+                  <a:srgbClr val="075985"/>
+                </a:solidFill>
+                <a:latin typeface="Calibri" pitchFamily="34" charset="0"/>
+                <a:ea typeface="Calibri" pitchFamily="34" charset="-122"/>
+                <a:cs typeface="Calibri" pitchFamily="34" charset="-120"/>
+              </a:rPr>
+              <a:t>DA COMPRENDERE OGGI</a:t>
+            </a:r>
+            <a:pPr indent="0" marL="0">
+              <a:buNone/>
+            </a:pPr>
+            <a:r>
+              <a:rPr lang="en-US" sz="1100" dirty="0">
+                <a:solidFill>
+                  <a:srgbClr val="075985"/>
+                </a:solidFill>
+                <a:latin typeface="Calibri" pitchFamily="34" charset="0"/>
+                <a:ea typeface="Calibri" pitchFamily="34" charset="-122"/>
+                <a:cs typeface="Calibri" pitchFamily="34" charset="-120"/>
+              </a:rPr>
+              <a:t> · naturali e overflow</a:t>
+            </a:r>
+            <a:endParaRPr lang="en-US" sz="1100" dirty="0"/>
           </a:p>
         </p:txBody>
       </p:sp>

--- a/it/slides/05-Architettura_dei_Calcolatori-Rappresentazione_dei_Numeri_Interi.pptx
+++ b/it/slides/05-Architettura_dei_Calcolatori-Rappresentazione_dei_Numeri_Interi.pptx
@@ -126,13 +126,13 @@
   <p:extLst>
     <p:ext uri="{521415D9-36F7-43E2-AB2F-B90AF26B5E84}">
       <p14:sectionLst xmlns:p14="http://schemas.microsoft.com/office/powerpoint/2010/main">
-        <p14:section name="Apertura" id="{b432e54a-4690-8896-69b5-d5a9c3956d0f}">
+        <p14:section name="Apertura" id="{fbc3e772-cb38-f524-5e08-562e6c55121e}">
           <p14:sldIdLst>
             <p14:sldId id="256"/>
             <p14:sldId id="257"/>
           </p14:sldIdLst>
         </p14:section>
-        <p14:section name="Basi e conversioni" id="{267d19d6-0252-9891-cd5e-5aeb80eb11e0}">
+        <p14:section name="Basi e conversioni" id="{fe8e6ad0-23a0-0a6d-45ff-f569f103c446}">
           <p14:sldIdLst>
             <p14:sldId id="258"/>
             <p14:sldId id="259"/>
@@ -140,14 +140,14 @@
             <p14:sldId id="261"/>
           </p14:sldIdLst>
         </p14:section>
-        <p14:section name="Numeri naturali e overflow" id="{595d2e1e-1ea0-0bec-0aaf-1035bf6fcece}">
+        <p14:section name="Numeri naturali e overflow" id="{885f8c19-a482-a82b-c56c-4f46ffb4df54}">
           <p14:sldIdLst>
             <p14:sldId id="262"/>
             <p14:sldId id="263"/>
             <p14:sldId id="264"/>
           </p14:sldIdLst>
         </p14:section>
-        <p14:section name="Interi con segno" id="{e9fd69b4-c4ba-894f-f2f7-600100b6652f}">
+        <p14:section name="Interi con segno" id="{59a5cd45-2f13-cab0-8ce9-03199f6431df}">
           <p14:sldIdLst>
             <p14:sldId id="265"/>
             <p14:sldId id="266"/>
@@ -157,7 +157,7 @@
             <p14:sldId id="270"/>
           </p14:sldIdLst>
         </p14:section>
-        <p14:section name="Ritorno alla macchina" id="{10d9a8a1-8958-c6da-7785-66aa9c42c7e1}">
+        <p14:section name="Ritorno alla macchina" id="{5eec7969-0e48-6111-a1e6-318206d73575}">
           <p14:sldIdLst>
             <p14:sldId id="271"/>
             <p14:sldId id="272"/>

--- a/it/slides/05-Architettura_dei_Calcolatori-Rappresentazione_dei_Numeri_Interi.pptx
+++ b/it/slides/05-Architettura_dei_Calcolatori-Rappresentazione_dei_Numeri_Interi.pptx
@@ -126,13 +126,13 @@
   <p:extLst>
     <p:ext uri="{521415D9-36F7-43E2-AB2F-B90AF26B5E84}">
       <p14:sectionLst xmlns:p14="http://schemas.microsoft.com/office/powerpoint/2010/main">
-        <p14:section name="Apertura" id="{fbc3e772-cb38-f524-5e08-562e6c55121e}">
+        <p14:section name="Apertura" id="{87b3da6d-e58d-392f-4362-6209030b65ab}">
           <p14:sldIdLst>
             <p14:sldId id="256"/>
             <p14:sldId id="257"/>
           </p14:sldIdLst>
         </p14:section>
-        <p14:section name="Basi e conversioni" id="{fe8e6ad0-23a0-0a6d-45ff-f569f103c446}">
+        <p14:section name="Basi e conversioni" id="{d0de1278-3f01-c221-8d8f-2ddd318904d9}">
           <p14:sldIdLst>
             <p14:sldId id="258"/>
             <p14:sldId id="259"/>
@@ -140,14 +140,14 @@
             <p14:sldId id="261"/>
           </p14:sldIdLst>
         </p14:section>
-        <p14:section name="Numeri naturali e overflow" id="{885f8c19-a482-a82b-c56c-4f46ffb4df54}">
+        <p14:section name="Numeri naturali e overflow" id="{f17afddb-676d-5c53-34f9-4011ef8aceb6}">
           <p14:sldIdLst>
             <p14:sldId id="262"/>
             <p14:sldId id="263"/>
             <p14:sldId id="264"/>
           </p14:sldIdLst>
         </p14:section>
-        <p14:section name="Interi con segno" id="{59a5cd45-2f13-cab0-8ce9-03199f6431df}">
+        <p14:section name="Interi con segno" id="{29456bff-6cd0-2f1a-8762-70d31c0d305a}">
           <p14:sldIdLst>
             <p14:sldId id="265"/>
             <p14:sldId id="266"/>
@@ -157,7 +157,7 @@
             <p14:sldId id="270"/>
           </p14:sldIdLst>
         </p14:section>
-        <p14:section name="Ritorno alla macchina" id="{5eec7969-0e48-6111-a1e6-318206d73575}">
+        <p14:section name="Ritorno alla macchina" id="{93282a95-aebe-e954-4152-cfd0a74f9442}">
           <p14:sldIdLst>
             <p14:sldId id="271"/>
             <p14:sldId id="272"/>
@@ -570,7 +570,7 @@
           <a:p>
             <a:r>
               <a:rPr lang="en-US" dirty="0"/>
-              <a:t>Questa lezione avvia la trattazione formale dei numeri. Si apre con una piccola sorpresa sulla macchina, un segnalino che va a sinistra oltre lo zero e mostra FFFFFFFF, e si chiude spiegando esattamente perché accade. In mezzo imparate a convertire tra basi, a dire quali numeri stanno in un dato numero di bit, e a scrivere i numeri negativi. La citazione di Trilussa, l'Uno che discute con lo Zero, ricorda che in un sistema posizionale anche uno zero ha il suo peso.
+              <a:t>Questa lezione avvia la trattazione formale della rappresentazione dei numeri. Si apre con un enigma osservato sulla macchina, un segnalino che si sposta a sinistra oltre lo zero e mostra FFFFFFFF, e si chiude spiegandolo per intero. Nel mezzo lo studente impara a convertire tra basi, a stabilire quali numeri un dato numero di bit può rappresentare, e a codificare i numeri negativi. La citazione di Trilussa, in cui l'Uno schernisce lo Zero, porta con sé un punto matematico preciso: in un sistema posizionale lo zero, che da solo non vale nulla, dà a ogni altra cifra il suo peso.
 Stato di apprendimento: DA COMPRENDERE OGGI, alla fine di questa lezione lo spiegate, lo seguite passo passo e lo applicate da soli; DA UTILIZZARE OGGI, oggi seguite e usate la ricetta; come funziona dentro si spiega più avanti, o non fa parte del corso; DA COMPRENDERE PIÙ AVANTI, riconoscete il nome e lo scopo; lo spiega una lezione successiva. Una slide senza etichetta è contesto: una storia, un esempio, una domanda, un esercizio.
 Stato di apprendimento di questa lezione. DA COMPRENDERE OGGI: il complemento a due; i cambi di base; naturali e overflow; shift come moltiplicazione; segno e modulo; istruzioni con o senza segno; l'estensione del segno. DA UTILIZZARE OGGI: le chiamate del runtime PRG32, il programma completo, gli strumenti di PRG32 (si usa, non si studia, in questo corso). DA COMPRENDERE PIÙ AVANTI: niente. Una slide senza etichetta è contesto: una storia, un esempio, una domanda, un esercizio.
 Per il docente: Spirale: la lezione si apre con il segnalino del laboratorio 06 del libro di PRG32 che va a sinistra oltre lo zero, e si chiude spiegandolo.</a:t>
@@ -661,7 +661,7 @@
           <a:p>
             <a:r>
               <a:rPr lang="en-US" dirty="0"/>
-              <a:t>L'idea più naturale: usare il bit più a sinistra per il segno e i bit restanti per il modulo. È facile da leggere per una persona, e ha due difetti. Lo zero ha due rappresentazioni, più zero e meno zero. E l'aritmetica è scomoda: per sommare due numeri di segno opposto il circuito deve confrontare i moduli, sottrarre il minore dal maggiore e scegliere il segno. Una rappresentazione che complica la somma è una legge scadente nel senso della sezione precedente.
+              <a:t>L'idea più naturale è dedicare il bit più a sinistra al segno e i restanti al modulo. La rappresentazione è facile da leggere per le persone ma ha due difetti. Lo zero ha due rappresentazioni, più zero e meno zero. E l'aritmetica diventa scomoda: per sommare due numeri di segno opposto un circuito deve confrontare i moduli, sottrarre il minore dal maggiore e scegliere il segno del risultato. Una rappresentazione che complica la somma è una cattiva scelta di legge nel senso introdotto prima. Segno e modulo sopravvive comunque nella mantissa dei numeri in virgola mobile, come mostra la Lezione 06.
 DA COMPRENDERE OGGI: segno e modulo.
 Per il docente: Semplice per le persone, scomodo per i circuiti. Sopravvive nella mantissa dei numeri in virgola mobile IEEE 754 (Lezione 06).</a:t>
             </a:r>
@@ -751,7 +751,7 @@
           <a:p>
             <a:r>
               <a:rPr lang="en-US" dirty="0"/>
-              <a:t>Il complemento a due. I numeri non negativi sono rappresentati da se stessi. Un numero negativo x è rappresentato da 2 alla n meno il suo modulo: su quattro bit, meno 3 è 16 meno 3, cioè 13, 1101. L'intervallo non è simmetrico: da meno 2 alla n meno 1 fino a 2 alla n meno 1, meno 1, quindi su quattro bit da meno 8 a più 7. Lo zero ha una sola rappresentazione, e il bit più a sinistra vale 1 esattamente quando il numero è negativo. Per un registro a 32 bit l'intervallo va da circa meno due miliardi a più due miliardi.
+              <a:t>Il complemento a due. I numeri non negativi sono rappresentati da sé stessi; un numero negativo x è rappresentato da 2^n - |x|, così che su quattro bit -3 è rappresentato da 16 - 3 = 13, cioè 1101. L'intervallo è asimmetrico, da -2^(n-1) a 2^(n-1) - 1, quindi da -8 a +7 su quattro bit. Lo zero ha un'unica rappresentazione, e il bit più a sinistra vale 1 esattamente quando il numero è negativo. Per un registro a 32 bit l'intervallo va da circa meno due miliardi a più due miliardi. È la rappresentazione usata da ogni processore moderno, RISC-V compreso.
 DA COMPRENDERE OGGI: il complemento a due.
 Per il docente: Detto anche complemento alla base. L'asimmetria dell'intervallo (un negativo in più) ha una conseguenza: cambiare segno al numero più negativo dà overflow.</a:t>
             </a:r>
@@ -841,7 +841,7 @@
           <a:p>
             <a:r>
               <a:rPr lang="en-US" dirty="0"/>
-              <a:t>Le stesse sedici configurazioni lette in tre modi. Nella tabella di sinistra, dove il bit più a sinistra è 0, le tre letture coincidono. Nella tabella di destra differiscono: 1000 vale 8 senza segno, meno zero in segno e modulo, e meno 8 in complemento a due; 1111 vale 15, meno 7 oppure meno 1. La frase in fondo è la chiave di tutta la lezione: i bit non dicono quale colonna è quella giusta. Lo dice il programma, attraverso le istruzioni che sceglie.
+              <a:t>Le stesse sedici configurazioni lette secondo tre leggi. Nella tabella di sinistra, dove il bit più a sinistra è 0, le tre letture coincidono. In quella di destra divergono: 1000 vale 8 senza segno, meno zero in segno e modulo e -8 in complemento a due; 1111 vale 15, -7 o -1. La frase in fondo è la chiave dell'intera lezione: i bit non indicano quale colonna sia corretta. Lo indica il programma, attraverso le istruzioni che sceglie di applicare a essi.
 DA COMPRENDERE OGGI: il complemento a due.
 Per il docente: Evidenziati: 1000 è meno zero in segno e modulo ma -8 in complemento a due; 1111 è -7 oppure -1. Complemento a uno ed eccesso 8 si aggiungono a questa tabella nella Lezione 06.</a:t>
             </a:r>
@@ -931,7 +931,7 @@
           <a:p>
             <a:r>
               <a:rPr lang="en-US" dirty="0"/>
-              <a:t>Con n bit i numeri formano un cerchio: dopo l'ultima configurazione viene la prima. Sommare 1 sposta di un passo in senso orario. L'anello interno dà il valore senza segno, i dischi esterni il valore in complemento a due. La ruota «si spezza» in due punti diversi. Per la lettura senza segno la rottura è in alto, tra 1111 e 0000: attraversarla è un riporto. Per il complemento a due è in basso, tra 0111 e 1000: attraversarla è un overflow con segno. E un passo indietro da 0000 porta a 1111: è l'FFFFFFFF del riscaldamento.
+              <a:t>Con n bit i numeri formano un cerchio: l'ultima configurazione è seguita dalla prima, perché l'aritmetica si svolge modulo 2^n. Sommare 1 fa avanzare di un passo in senso orario. L'anello interno mostra il valore senza segno, i dischi esterni il valore in complemento a due. Il cerchio è "spezzato" in due punti diversi. Per la lettura senza segno la discontinuità sta in alto, tra 1111 e 0000, e attraversarla è un riporto. Per il complemento a due sta in basso, tra 0111 e 1000, e attraversarla è un overflow con segno. Un passo indietro da 0000 raggiunge 1111: è esattamente l'FFFFFFFF del riscaldamento.
 DA COMPRENDERE OGGI: il complemento a due.
 Per il docente: Anello interno: valore senza segno. In mezzo: i bit. Dischi esterni: valore in complemento a due. Lo stesso addizionatore serve entrambe le letture: cambia solo il punto in cui la ruota «si spezza».</a:t>
             </a:r>
@@ -1021,7 +1021,7 @@
           <a:p>
             <a:r>
               <a:rPr lang="en-US" dirty="0"/>
-              <a:t>Tre calcoli che mostrano il vantaggio del complemento a due. Per sommare 2 e meno 6 basta sommare le due configurazioni: 0010 più 1010 fa 1100, che si legge meno 4. Per sommare due negativi si sommano le configurazioni e si scarta il riporto uscente dalla posizione più a sinistra. Perfino il prodotto funziona sui quattro bit bassi. La prima riga dell'elenco è il punto: all'addizionatore non serve conoscere i segni. Il circuito che somma i numeri naturali dà già la risposta giusta per quelli con segno.
+              <a:t>Tre calcoli mostrano il vantaggio decisivo del complemento a due. Per sommare 2 e -6 basta sommare le due configurazioni: 0010 più 1010 dà 1100, che si legge -4. Per sommare due numeri negativi si sommano le configurazioni e si scarta il riporto uscente dalla posizione più a sinistra. Anche i quattro bit bassi del prodotto sono corretti. La prima riga di punti elenco ne enuncia la conseguenza: il sommatore non ha bisogno di conoscere i segni degli operandi. Il circuito che somma i numeri naturali dà già il risultato corretto per quelli con segno, quindi un solo sommatore serve entrambi.
 DA COMPRENDERE OGGI: il complemento a due.
 Per il docente: Verifica del prodotto: 2 x 13 = 26 = 1 1010; i quattro bit bassi sono 1010, che si legge -6. Per questo RISC-V ha una sola mul per operandi con e senza segno.</a:t>
             </a:r>
@@ -1111,7 +1111,7 @@
           <a:p>
             <a:r>
               <a:rPr lang="en-US" dirty="0"/>
-              <a:t>Gli overflow sono due, e sono indipendenti. Per i numeri senza segno l'overflow è un riporto uscente dal bit più a sinistra: 128 più 130 su otto bit lascia 2 nel registro. Per i numeri con segno l'overflow è un risultato con il segno sbagliato: 127 più 127 non produce riporto uscente, ma la configurazione si legge meno 2. La regola: due operandi positivi che danno una somma negativa, o due negativi che danno una somma positiva. Due operandi di segno opposto non possono mai dare overflow, perché il risultato sta tra i due.
+              <a:t>Ci sono due nozioni distinte di overflow, e sono indipendenti. Per i numeri senza segno, l'overflow è un riporto uscente dal bit più a sinistra: 128 più 130 su otto bit lascia 2 nel registro. Per i numeri con segno, l'overflow è un risultato del segno sbagliato: 127 più 127 non produce riporto uscente, eppure la configurazione si legge -2. Ne segue la regola: due operandi positivi che danno una somma negativa, o due negativi che danno una somma positiva. Operandi di segno opposto non possono mai dare overflow, perché il risultato esatto sta tra di essi ed è quindi rappresentabile.
 DA COMPRENDERE OGGI: il complemento a due.
 Per il docente: Regola circuitale equivalente per l'overflow con segno: il riporto entrante nel bit più significativo è diverso da quello uscente.</a:t>
             </a:r>
@@ -1201,7 +1201,7 @@
           <a:p>
             <a:r>
               <a:rPr lang="en-US" dirty="0"/>
-              <a:t>Come si porta un numero su più bit senza cambiarne il valore? In complemento a due si copia il bit di segno in tutte le nuove posizioni: meno 1 su quattro bit, 1111, diventa 1111 1111 su otto; più 5, 0101, diventa 0000 0101. È l'estensione del segno. Il processore la esegue ogni volta che un valore corto ne incontra uno lungo: la costante a dodici bit di addi viene estesa con segno a trentadue bit, e lb estende il segno del byte che carica, mentre lbu riempie di zeri.
+              <a:t>Come si può portare un numero su più bit senza cambiarne il valore? In complemento a due, copiando il bit del segno in ogni nuova posizione: -1 su quattro bit, 1111, diventa 1111 1111 su otto; +5, 0101, diventa 0000 0101. È l'estensione del segno. Il processore la esegue ogni volta che un valore stretto incontra uno largo: l'immediato a dodici bit di addi viene esteso con segno a trentadue bit, e lb estende con segno il byte che carica, mentre lbu riempie con zeri i bit alti. La scelta tra i due caricamenti è un'affermazione su che cosa significhi il byte.
 DA COMPRENDERE OGGI: l'estensione del segno.
 Per il docente: Estendere con zeri trasformerebbe 1111 (-1) in 0000 1111 (+15). L'estensione del segno è la controparte con segno della proprietà di «estensione a sinistra» vista per i naturali.</a:t>
             </a:r>
@@ -1291,8 +1291,8 @@
           <a:p>
             <a:r>
               <a:rPr lang="en-US" dirty="0"/>
-              <a:t>Il bit più a sinistra vale 1, quindi il numero è negativo: scartate 252, che è la lettura senza segno. Per trovare il modulo si cambia segno: complemento, 0000 0011, e si somma uno, 0000 0100, cioè 4. La configurazione vale meno 4.
-Su otto bit in complemento a due l'intervallo va da meno 128 a più 127. Calcolate ogni somma e guardate se cade nell'intervallo. Ricordate che operandi di segno opposto non possono dare overflow, e questo esclude due opzioni in un colpo.
+              <a:t>Per la prima domanda, il bit più a sinistra è 1, quindi il numero è negativo, e 252, la lettura senza segno, va scartato. Il modulo si trova cambiando segno: complementando si ottiene 0000 0011, e sommando uno si ottiene 0000 0100, cioè 4. La configurazione rappresenta quindi -4.
+Per la seconda, l'intervallo in complemento a due su otto bit va da -128 a +127. Si calcola ogni somma e la si confronta con l'intervallo. Ricordare che operandi di segno opposto non danno overflow elimina subito due opzioni.
 Per il docente: 1. Risposta: B. Si complementa e si somma uno: 0000 0011 + 1 = 0000 0100 = 4, quindi la configurazione vale -4. (252 è la sua lettura senza segno.)
 2. Risposta: B. L'intervallo è [-128, 127]. 100 + 27 = 127 ci sta; 100 + 28 = 128 no: due positivi danno una configurazione negativa (1000 0000 = -128).</a:t>
             </a:r>
@@ -1382,8 +1382,8 @@
           <a:p>
             <a:r>
               <a:rPr lang="en-US" dirty="0"/>
-              <a:t>Gli stessi due registri, due istruzioni che differiscono per una lettera. slt legge FFFFFFFF come meno 1, che è minore di 1. sltu lo legge come più di quattro miliardi, che non lo è. Questa domanda è l'intera lezione in una riga.
-Usate le moltiplicazioni successive: 0,625 per 2 fa 1,25, cifra 1; 0,25 per 2 fa 0,5, cifra 0; 0,5 per 2 fa 1,0, cifra 1. Verifica con i pesi: un mezzo più un ottavo fa 0,625.
+              <a:t>Per la prima domanda: gli stessi due registri, e due istruzioni che differiscono per una sola lettera. slt interpreta FFFFFFFF come -1, che è minore di 1; sltu lo interpreta come un valore superiore a quattro miliardi, che non lo è. La domanda condensa l'intera lezione in una riga.
+Per la seconda si applica la moltiplicazione ripetuta: 0,625 per 2 dà 1,25, cifra 1; 0,25 per 2 dà 0,5, cifra 0; 0,5 per 2 dà 1,0, cifra 1. Il risultato si verifica con i pesi posizionali: un mezzo più un ottavo fa 0,625.
 Per il docente: 1. Risposta: C. Con segno: -1 &lt; 1 è vero, quindi t2 = 1. Senza segno: 4.294.967.295 &lt; 1 è falso, quindi t3 = 0.
 2. Risposta: A. 0,625 x 2 = 1,25 (1); 0,25 x 2 = 0,5 (0); 0,5 x 2 = 1,0 (1): 0,101 = 1/2 + 1/8.</a:t>
             </a:r>
@@ -1473,7 +1473,7 @@
           <a:p>
             <a:r>
               <a:rPr lang="en-US" dirty="0"/>
-              <a:t>Dodici termini. Signed integer è il numero relativo, o intero con segno. Carry e borrow sono il riporto di un'addizione e il prestito di una sottrazione. Sign extension, estensione del segno, è l'operazione che allarga un numero con segno. To clamp non ha un'unica parola italiana: significa limitare un valore a un intervallo.</a:t>
+              <a:t>Dodici termini. Signed integer si rende in italiano con numero relativo o intero con segno. Carry e borrow indicano il riporto nella somma e il prestito nella sottrazione. L'estensione del segno è l'operazione che allarga un numero con segno conservandone il valore. To clamp non ha un unico equivalente italiano: significa vincolare un valore a un intervallo.</a:t>
             </a:r>
             <a:endParaRPr lang="en-US" dirty="0"/>
           </a:p>
@@ -1561,7 +1561,7 @@
           <a:p>
             <a:r>
               <a:rPr lang="en-US" dirty="0"/>
-              <a:t>Sei obiettivi. I primi tre sono abilità su carta: convertire tra le basi 2, 8, 10 e 16, dire quali naturali stanno in n bit, e codificare in due modi gli interi con segno. Il quarto è aritmetica: sommare, sottrarre e cambiare segno in complemento a due, e riconoscere un overflow. Gli ultimi due tornano alla macchina: spiegare l'FFFFFFFF del riscaldamento, e scegliere l'istruzione RISC-V che legge gli stessi bit come numero con segno o senza segno.</a:t>
+              <a:t>Sei risultati di apprendimento. I primi tre sono abilità da esercitare su carta: convertire tra le basi 2, 8, 10 e 16, stabilire quali numeri naturali stanno in n bit, e codificare gli interi con segno in due rappresentazioni. Il quarto riguarda l'aritmetica: somma, sottrazione e cambio di segno in complemento a due, insieme al riconoscimento dell'overflow. Gli ultimi due tornano alla macchina: spiegare l'FFFFFFFF del riscaldamento, e scegliere l'istruzione RISC-V che interpreta gli stessi bit come numero con segno o senza segno.</a:t>
             </a:r>
             <a:endParaRPr lang="en-US" dirty="0"/>
           </a:p>
@@ -1649,7 +1649,7 @@
           <a:p>
             <a:r>
               <a:rPr lang="en-US" dirty="0"/>
-              <a:t>Cinque conclusioni. Ogni base ha il suo uso: la due per i circuiti, la sedici per le persone che leggono i bit. Con n bit ci sono 2 alla n numeri, e la legge di codifica dice quali. Il complemento a due trasforma la sottrazione in addizione. L'overflow è il prezzo dei registri finiti: lo si rileva, oppure lo si esclude per progetto come con il clamp. E in RISC-V i bit non hanno tipo: sceglie l'istruzione. La prossima lezione completa il quadro con i numeri reali.
+              <a:t>Cinque conclusioni. Ogni base ha il suo scopo: la base due per i circuiti, la base sedici per chi legge i bit. Con n bit sono rappresentabili esattamente 2^n numeri, e la legge di codifica stabilisce quali. Il complemento a due riduce la sottrazione alla somma, così che un solo sommatore serve l'aritmetica con e senza segno. L'overflow è il prezzo dei registri finiti: va rilevato, oppure evitato per costruzione, come fa il clamp. E in RISC-V i bit non hanno tipo: è l'istruzione a decidere come vanno letti. La prossima lezione completa il quadro con la rappresentazione dei numeri reali.
 Stato di apprendimento, riepilogo. DA COMPRENDERE OGGI: il complemento a due; i cambi di base; naturali e overflow; shift come moltiplicazione; segno e modulo; istruzioni con o senza segno; l'estensione del segno. DA UTILIZZARE OGGI: le chiamate del runtime PRG32, il programma completo, gli strumenti di PRG32 (si usa, non si studia, in questo corso). DA COMPRENDERE PIÙ AVANTI: niente. Una slide senza etichetta è contesto: una storia, un esempio, una domanda, un esercizio.
 Per il docente: Prossima lezione: complemento a uno, eccesso k, virgola fissa e virgola mobile IEEE 754.</a:t>
             </a:r>
@@ -1739,7 +1739,7 @@
           <a:p>
             <a:r>
               <a:rPr lang="en-US" dirty="0"/>
-              <a:t>Un sistema posizionale in base b usa b cifre, da 0 a b meno 1, e il valore di un numero è la somma di ogni cifra per la potenza di b che corrisponde alla sua posizione: la formula della didascalia. La tabella mostra il tredici in quattro basi: 1101 in binario, 15 in ottale, 13 in decimale, D in esadecimale. È sempre lo stesso numero: cambia solo la scrittura. Per una macchina la base 10 non ha alcuno statuto speciale; è la base di chi ha dieci dita.
+              <a:t>Un sistema posizionale in base b usa b cifre, da 0 a b - 1, e il valore di un numerale è la somma di ogni cifra moltiplicata per la potenza di b corrispondente alla sua posizione, come dice la formula in didascalia. La tabella scrive tredici in quattro basi: 1101 in binario, 15 in ottale, 13 in decimale, D in esadecimale. Il numero è lo stesso in ogni caso; cambia solo la notazione. La base dieci non gode di alcun privilegio per una macchina: è semplicemente la base di una specie con dieci dita.
 DA COMPRENDERE OGGI: i cambi di base.
 Per il docente: Un numero N è una stringa di cifre d(n-1) ... d(1) d(0), ciascuna minore della base b. Il valore è la somma di ogni cifra per la potenza della base corrispondente alla sua posizione.</a:t>
             </a:r>
@@ -1829,7 +1829,7 @@
           <a:p>
             <a:r>
               <a:rPr lang="en-US" dirty="0"/>
-              <a:t>Le basi che sono potenze di due condividono gli stessi bit. La slide prende 127, lo scrive in binario, e raggruppa i bit da destra: a quattro a quattro, ogni gruppo è una cifra esadecimale, e si ottiene 7F; a tre a tre, ogni gruppo è una cifra ottale, e si ottiene 177. Non serve alcuna divisione, solo una ricerca in tabella. Due dettagli: si raggruppa sempre da destra, dal lato meno significativo, e il gruppo più a sinistra, se incompleto, si completa con zeri.
+              <a:t>Le basi che sono potenze di due condividono gli stessi bit, il che riduce la conversione tra di esse a un semplice raggruppamento. La slide scrive 127 in binario e ne raggruppa i bit da destra: gruppi di quattro danno le cifre esadecimali, 7F; gruppi di tre danno le cifre ottali, 177. Non serve alcuna divisione, solo la consultazione di una tabella. Vanno rispettati due dettagli: il raggruppamento parte sempre da destra, l'estremo meno significativo, e il gruppo più a sinistra, se incompleto, si completa con zeri.
 DA COMPRENDERE OGGI: i cambi di base.
 Per il docente: Si raggruppa da destra (dal lato meno significativo) e si completa con zeri a sinistra.</a:t>
             </a:r>
@@ -1919,7 +1919,7 @@
           <a:p>
             <a:r>
               <a:rPr lang="en-US" dirty="0"/>
-              <a:t>Per convertire un intero dalla base 10 alla base r si divide ripetutamente per r: ogni resto è una cifra, e il quoziente si divide di nuovo finché non diventa zero. Le tre tabelle lo fanno per 127 con r uguale a 8, 16 e 2. Il riquadro giallo contiene il dettaglio che si sbaglia più spesso: il primo resto è la cifra meno significativa, quindi i resti si leggono dal basso verso l'alto. Verifica: 177 in ottale è 64 + 56 + 7 = 127.
+              <a:t>Per convertire un intero dalla base dieci alla base r si divide ripetutamente per r: ogni resto è una cifra, e il quoziente si divide di nuovo finché non diventa zero. Le tre tabelle eseguono il procedimento per 127 con r uguale a 8, 16 e 2. Il riquadro evidenziato riguarda l'errore più frequente: il primo resto è la cifra meno significativa, quindi i resti vanno letti dal basso verso l'alto. Il risultato si può sempre verificare valutandolo in forma posizionale: 177 in ottale è 64 + 56 + 7 = 127.
 DA COMPRENDERE OGGI: i cambi di base.
 Per il docente: N = Q(n) r^(n+1) + R(n) r^n + ... + R(1) r + R(0). In C le due operazioni sono / e %; in RISC-V (estensione M) sono divu e remu.</a:t>
             </a:r>
@@ -2009,7 +2009,7 @@
           <a:p>
             <a:r>
               <a:rPr lang="en-US" dirty="0"/>
-              <a:t>Per un numero tra 0 e 1 il procedimento è speculare: si moltiplica ripetutamente per r; ogni volta la parte intera del prodotto è una cifra, a partire dalla più significativa, e la parte frazionaria si moltiplica di nuovo. 0,875 dà 0,111 e si ferma, perché la frazione diventa zero. 0,8 non si ferma mai: tornano le stesse frazioni, e le cifre 1100 si ripetono all'infinito. Un numero finito in base dieci può essere periodico in base due, e con un numero finito di bit va troncato. È l'origine degli errori di arrotondamento della Lezione 06.
+              <a:t>Per un numero compreso tra 0 e 1 il procedimento è speculare: si moltiplica ripetutamente per r, e a ogni passo la parte intera del prodotto è una cifra, a partire dalla più significativa, mentre la parte frazionaria si moltiplica di nuovo. 0,875 dà 0,111 e termina, perché la frazione diventa zero. 0,8 non termina mai: le stesse frazioni ricorrono e le cifre 1100 si ripetono all'infinito. Un numero con rappresentazione finita in base dieci può dunque essere periodico in base due, e un numero finito di bit deve troncarlo. È l'origine degli errori di arrotondamento studiati nella Lezione 06.
 DA COMPRENDERE OGGI: i cambi di base.
 Per il docente: N = R(1) r^-1 + R(2) r^-2 + ... Le slide originali rimandavano a due convertitori online (fermimn.edu.it e fauser.edu); qualunque calcolatrice moderna in modalità programmatore fa lo stesso.</a:t>
             </a:r>
@@ -2099,7 +2099,7 @@
           <a:p>
             <a:r>
               <a:rPr lang="en-US" dirty="0"/>
-              <a:t>Per i numeri naturali la legge è la più semplice possibile: X è x scritto in binario. Con n bit ci sono 2 alla n configurazioni, quindi i numeri vanno da 0 a 2 alla n meno 1: con quattro bit, da 0 a 15, come mostra la striscia. La tabella dà i casi che si incontrano su RISC-V: un byte arriva a 255, una halfword a 65.535, una parola a 4.294.967.295. Quest'ultimo è la lettura senza segno di FFFFFFFF: metà della risposta al riscaldamento.
+              <a:t>Per i numeri naturali la legge di rappresentazione è la più semplice possibile: X è x scritto in binario. Con n bit ci sono 2^n configurazioni, quindi l'intervallo rappresentabile va da 0 a 2^n - 1, da 0 a 15 per quattro bit come mostra la striscia. La tabella dà le dimensioni che ricorrono su RISC-V: un byte arriva a 255, una halfword a 65.535, una word a 4.294.967.295. L'ultimo valore è la lettura senza segno di FFFFFFFF, e quindi metà della risposta al riscaldamento.
 DA COMPRENDERE OGGI: naturali e overflow.
 Per il docente: 4.294.967.295 è la lettura senza segno di 0xFFFFFFFF: la prima metà della risposta al riscaldamento.</a:t>
             </a:r>
@@ -2189,7 +2189,7 @@
           <a:p>
             <a:r>
               <a:rPr lang="en-US" dirty="0"/>
-              <a:t>La definizione da ricordare. Un registro ha un numero finito di bit, quindi rappresenta un sottoinsieme finito di un insieme infinito di numeri. Le operazioni aritmetiche sono chiuse sull'insieme intero, non sul sottoinsieme: la somma di due numeri rappresentabili può cadere fuori. Quando accade si ha un overflow. L'esempio usa sette bit, che coprono da 0 a 127: 100 e 38 sono entrambi rappresentabili, e la loro somma, 138, no. L'overflow non è un difetto della macchina: è una conseguenza della finitezza.
+              <a:t>La definizione da ricordare. Un registro ha un numero finito di bit e rappresenta quindi un sottoinsieme finito di un insieme infinito di numeri. Le operazioni aritmetiche sono chiuse sull'intero insieme ma non sul sottoinsieme: la somma di due numeri rappresentabili può cadere fuori, e quando accade si è verificato un overflow. L'esempio usa sette bit, che coprono da 0 a 127: 100 e 38 sono entrambi rappresentabili, mentre la loro somma, 138, non lo è. L'overflow non è un malfunzionamento della macchina; è una conseguenza necessaria della finitezza, e la questione ingegneristica è come rilevarlo o evitarlo.
 DA COMPRENDERE OGGI: naturali e overflow.</a:t>
             </a:r>
             <a:endParaRPr lang="en-US" dirty="0"/>
@@ -2278,7 +2278,7 @@
           <a:p>
             <a:r>
               <a:rPr lang="en-US" dirty="0"/>
-              <a:t>Quattro calcoli su quattro bit, svolti colonna per colonna come in decimale: 1 più 1 fa 0 con riporto di 1. Sei più otto ci sta. Quattordici più tre fa diciassette, che richiede un quinto bit: un overflow. La differenza usa il prestito come in decimale. Il prodotto di due numeri di n bit può richiedere 2n bit, ed è per questo che RISC-V ha due istruzioni: mul per la metà bassa del prodotto e mulhu per la metà alta. Rifate a mano i quattro calcoli, coprendo i risultati.
+              <a:t>Quattro calcoli su quattro bit, eseguiti colonna per colonna esattamente come in decimale: 1 più 1 dà 0 con riporto di 1. Sei più otto ci sta. Quattordici più tre dà diciassette, che richiede un quinto bit: un overflow. La sottrazione prende in prestito come in decimale. Il prodotto di due numeri di n bit può richiedere 2n bit, ed è per questo che RISC-V fornisce due istruzioni, mul per la metà bassa del prodotto e mulhu per quella alta. Conviene rifare a mano i quattro calcoli coprendo i risultati.
 DA COMPRENDERE OGGI: naturali e overflow.
 Per il docente: La slide originale diceva che l'overflow «si può rilevare mediante il bit di overflow»: vero per i processori con registro dei flag, non per RISC-V. Si veda l'ultima sezione.</a:t>
             </a:r>
@@ -3358,7 +3358,7 @@
                 <a:ea typeface="Calibri" pitchFamily="34" charset="-122"/>
                 <a:cs typeface="Calibri" pitchFamily="34" charset="-120"/>
               </a:rPr>
-              <a:t>05-Architettura_dei_Calcolatori-Rappresentazione_dei_Numeri_Interi-Codice.pptx</a:t>
+              <a:t>05-Architettura_dei_Calcolatori-Rappresentazione_dei_Numeri_Interi-Lab.pptx</a:t>
             </a:r>
             <a:endParaRPr lang="en-US" sz="1300" dirty="0"/>
           </a:p>

--- a/it/slides/05-Architettura_dei_Calcolatori-Rappresentazione_dei_Numeri_Interi.pptx
+++ b/it/slides/05-Architettura_dei_Calcolatori-Rappresentazione_dei_Numeri_Interi.pptx
@@ -126,13 +126,13 @@
   <p:extLst>
     <p:ext uri="{521415D9-36F7-43E2-AB2F-B90AF26B5E84}">
       <p14:sectionLst xmlns:p14="http://schemas.microsoft.com/office/powerpoint/2010/main">
-        <p14:section name="Apertura" id="{87b3da6d-e58d-392f-4362-6209030b65ab}">
+        <p14:section name="Apertura" id="{f8e291f9-4ee3-29e0-38b2-2e70f3ddc5f1}">
           <p14:sldIdLst>
             <p14:sldId id="256"/>
             <p14:sldId id="257"/>
           </p14:sldIdLst>
         </p14:section>
-        <p14:section name="Basi e conversioni" id="{d0de1278-3f01-c221-8d8f-2ddd318904d9}">
+        <p14:section name="Basi e conversioni" id="{1f74745c-6c4b-2c25-eec8-72ecd3a9e8b7}">
           <p14:sldIdLst>
             <p14:sldId id="258"/>
             <p14:sldId id="259"/>
@@ -140,14 +140,14 @@
             <p14:sldId id="261"/>
           </p14:sldIdLst>
         </p14:section>
-        <p14:section name="Numeri naturali e overflow" id="{f17afddb-676d-5c53-34f9-4011ef8aceb6}">
+        <p14:section name="Numeri naturali e overflow" id="{e4d7acec-4276-2acc-4575-41fcc0ef8450}">
           <p14:sldIdLst>
             <p14:sldId id="262"/>
             <p14:sldId id="263"/>
             <p14:sldId id="264"/>
           </p14:sldIdLst>
         </p14:section>
-        <p14:section name="Interi con segno" id="{29456bff-6cd0-2f1a-8762-70d31c0d305a}">
+        <p14:section name="Interi con segno" id="{7d896054-5c02-3f6a-f403-4a389f2e62eb}">
           <p14:sldIdLst>
             <p14:sldId id="265"/>
             <p14:sldId id="266"/>
@@ -157,7 +157,7 @@
             <p14:sldId id="270"/>
           </p14:sldIdLst>
         </p14:section>
-        <p14:section name="Ritorno alla macchina" id="{93282a95-aebe-e954-4152-cfd0a74f9442}">
+        <p14:section name="Ritorno alla macchina" id="{a2266544-3c1b-03c5-641b-2b551281b4a8}">
           <p14:sldIdLst>
             <p14:sldId id="271"/>
             <p14:sldId id="272"/>

--- a/it/slides/05-Architettura_dei_Calcolatori-Rappresentazione_dei_Numeri_Interi.pptx
+++ b/it/slides/05-Architettura_dei_Calcolatori-Rappresentazione_dei_Numeri_Interi.pptx
@@ -126,13 +126,13 @@
   <p:extLst>
     <p:ext uri="{521415D9-36F7-43E2-AB2F-B90AF26B5E84}">
       <p14:sectionLst xmlns:p14="http://schemas.microsoft.com/office/powerpoint/2010/main">
-        <p14:section name="Apertura" id="{f8e291f9-4ee3-29e0-38b2-2e70f3ddc5f1}">
+        <p14:section name="Apertura" id="{a2e97cf5-238b-fb75-35dc-e8b8d61d1078}">
           <p14:sldIdLst>
             <p14:sldId id="256"/>
             <p14:sldId id="257"/>
           </p14:sldIdLst>
         </p14:section>
-        <p14:section name="Basi e conversioni" id="{1f74745c-6c4b-2c25-eec8-72ecd3a9e8b7}">
+        <p14:section name="Basi e conversioni" id="{5f633245-2d84-3191-ae81-5bc4c35a38c3}">
           <p14:sldIdLst>
             <p14:sldId id="258"/>
             <p14:sldId id="259"/>
@@ -140,14 +140,14 @@
             <p14:sldId id="261"/>
           </p14:sldIdLst>
         </p14:section>
-        <p14:section name="Numeri naturali e overflow" id="{e4d7acec-4276-2acc-4575-41fcc0ef8450}">
+        <p14:section name="Numeri naturali e overflow" id="{8005f302-93db-5bac-5a75-c5288c0bad9c}">
           <p14:sldIdLst>
             <p14:sldId id="262"/>
             <p14:sldId id="263"/>
             <p14:sldId id="264"/>
           </p14:sldIdLst>
         </p14:section>
-        <p14:section name="Interi con segno" id="{7d896054-5c02-3f6a-f403-4a389f2e62eb}">
+        <p14:section name="Interi con segno" id="{76672082-a33b-8886-f5db-708663e1d460}">
           <p14:sldIdLst>
             <p14:sldId id="265"/>
             <p14:sldId id="266"/>
@@ -157,7 +157,7 @@
             <p14:sldId id="270"/>
           </p14:sldIdLst>
         </p14:section>
-        <p14:section name="Ritorno alla macchina" id="{a2266544-3c1b-03c5-641b-2b551281b4a8}">
+        <p14:section name="Ritorno alla macchina" id="{e9e6fbba-067c-142f-5b6e-2da201e2d58b}">
           <p14:sldIdLst>
             <p14:sldId id="271"/>
             <p14:sldId id="272"/>
@@ -573,6 +573,7 @@
               <a:t>Questa lezione avvia la trattazione formale della rappresentazione dei numeri. Si apre con un enigma osservato sulla macchina, un segnalino che si sposta a sinistra oltre lo zero e mostra FFFFFFFF, e si chiude spiegandolo per intero. Nel mezzo lo studente impara a convertire tra basi, a stabilire quali numeri un dato numero di bit può rappresentare, e a codificare i numeri negativi. La citazione di Trilussa, in cui l'Uno schernisce lo Zero, porta con sé un punto matematico preciso: in un sistema posizionale lo zero, che da solo non vale nulla, dà a ogni altra cifra il suo peso.
 Stato di apprendimento: DA COMPRENDERE OGGI, alla fine di questa lezione lo spiegate, lo seguite passo passo e lo applicate da soli; DA UTILIZZARE OGGI, oggi seguite e usate la ricetta; come funziona dentro si spiega più avanti, o non fa parte del corso; DA COMPRENDERE PIÙ AVANTI, riconoscete il nome e lo scopo; lo spiega una lezione successiva. Una slide senza etichetta è contesto: una storia, un esempio, una domanda, un esercizio.
 Stato di apprendimento di questa lezione. DA COMPRENDERE OGGI: il complemento a due; i cambi di base; naturali e overflow; shift come moltiplicazione; segno e modulo; istruzioni con o senza segno; l'estensione del segno. DA UTILIZZARE OGGI: le chiamate del runtime PRG32, il programma completo, gli strumenti di PRG32 (si usa, non si studia, in questo corso). DA COMPRENDERE PIÙ AVANTI: niente. Una slide senza etichetta è contesto: una storia, un esempio, una domanda, un esercizio.
+Percorso. I risultati di oggi: (1) convertire tra basi e leggere una configurazione di n bit come naturale e in complemento a due; (2) riconoscere il trabocco nella somma di naturali e di interi; (3) scegliere tra istruzioni con e senza segno, comprese lb e lbu. Si appoggia su: solo ciò che ha preparato la Lezione 01. Prossimo passo: Lezione 06, Rappresentazione dei numeri: i reali.
 Per il docente: Spirale: la lezione si apre con il segnalino del laboratorio 06 del libro di PRG32 che va a sinistra oltre lo zero, e si chiude spiegandolo.</a:t>
             </a:r>
             <a:endParaRPr lang="en-US" dirty="0"/>
@@ -1650,7 +1651,7 @@
             <a:r>
               <a:rPr lang="en-US" dirty="0"/>
               <a:t>Cinque conclusioni. Ogni base ha il suo scopo: la base due per i circuiti, la base sedici per chi legge i bit. Con n bit sono rappresentabili esattamente 2^n numeri, e la legge di codifica stabilisce quali. Il complemento a due riduce la sottrazione alla somma, così che un solo sommatore serve l'aritmetica con e senza segno. L'overflow è il prezzo dei registri finiti: va rilevato, oppure evitato per costruzione, come fa il clamp. E in RISC-V i bit non hanno tipo: è l'istruzione a decidere come vanno letti. La prossima lezione completa il quadro con la rappresentazione dei numeri reali.
-Stato di apprendimento, riepilogo. DA COMPRENDERE OGGI: il complemento a due; i cambi di base; naturali e overflow; shift come moltiplicazione; segno e modulo; istruzioni con o senza segno; l'estensione del segno. DA UTILIZZARE OGGI: le chiamate del runtime PRG32, il programma completo, gli strumenti di PRG32 (si usa, non si studia, in questo corso). DA COMPRENDERE PIÙ AVANTI: niente. Una slide senza etichetta è contesto: una storia, un esempio, una domanda, un esercizio.
+Stato di apprendimento, riepilogo. DA COMPRENDERE OGGI: il complemento a due; i cambi di base; naturali e overflow; shift come moltiplicazione; segno e modulo; istruzioni con o senza segno; l'estensione del segno. DA UTILIZZARE OGGI: le chiamate del runtime PRG32, il programma completo, gli strumenti di PRG32 (si usa, non si studia, in questo corso). DA COMPRENDERE PIÙ AVANTI: niente. Una slide senza etichetta è contesto: una storia, un esempio, una domanda, un esercizio. Il filo della lezione: Lo 0xFFFFFFFF di un contatore sceso sotto zero è -1 in complemento a due: i bit non sono cambiati, è cambiata la lettura. Prossimo passo: le frazioni su un chip senza unità in virgola mobile. Biglietto d'uscita (da due a quattro minuti, da soli, su carta): 1. In memoria c'è il byte 0xF6. Quale valore a 32 bit lascia lb in un registro, e quale lbu? Quale è giusto se il byte è una temperatura di -10 gradi? 2. Su 8 bit, calcolate 0111 1111 + 0000 0001. Leggete il risultato come naturale e in complemento a due. C'è trabocco in ciascuna lettura?
 Per il docente: Prossima lezione: complemento a uno, eccesso k, virgola fissa e virgola mobile IEEE 754.</a:t>
             </a:r>
             <a:endParaRPr lang="en-US" dirty="0"/>
